--- a/ai/edit-slice/presentation/DECK.pptx
+++ b/ai/edit-slice/presentation/DECK.pptx
@@ -14,6 +14,8 @@
     <p:sldId id="262" r:id="rId14"/>
     <p:sldId id="263" r:id="rId15"/>
     <p:sldId id="264" r:id="rId16"/>
+    <p:sldId id="265" r:id="rId17"/>
+    <p:sldId id="266" r:id="rId18"/>
   </p:sldIdLst>
   <p:sldSz cx="12192000" cy="6858000" type="screen4x3"/>
   <p:notesSz cx="6858000" cy="9144000"/>
@@ -535,6 +537,146 @@
 </p:notes>
 </file>
 
+<file path=ppt/notesSlides/notesSlide10.xml><?xml version="1.0" encoding="utf-8"?>
+<p:notes xmlns:a="http://schemas.openxmlformats.org/drawingml/2006/main" xmlns:p="http://schemas.openxmlformats.org/presentationml/2006/main" xmlns:r="http://schemas.openxmlformats.org/officeDocument/2006/relationships">
+  <p:cSld>
+    <p:spTree>
+      <p:nvGrpSpPr>
+        <p:cNvPr id="1" name=""/>
+        <p:cNvGrpSpPr/>
+        <p:nvPr/>
+      </p:nvGrpSpPr>
+      <p:grpSpPr>
+        <a:xfrm>
+          <a:off x="0" y="0"/>
+          <a:ext cx="0" cy="0"/>
+          <a:chOff x="0" y="0"/>
+          <a:chExt cx="0" cy="0"/>
+        </a:xfrm>
+      </p:grpSpPr>
+      <p:sp>
+        <p:nvSpPr>
+          <p:cNvPr id="2" name="Slide Image Placeholder 1"/>
+          <p:cNvSpPr>
+            <a:spLocks noGrp="1"/>
+          </p:cNvSpPr>
+          <p:nvPr>
+            <p:ph type="sldImg" idx="2"/>
+          </p:nvPr>
+        </p:nvSpPr>
+        <p:spPr/>
+      </p:sp>
+      <p:sp>
+        <p:nvSpPr>
+          <p:cNvPr id="3" name="Notes Placeholder 2"/>
+          <p:cNvSpPr>
+            <a:spLocks noGrp="1"/>
+          </p:cNvSpPr>
+          <p:nvPr>
+            <p:ph type="body" idx="3" sz="quarter"/>
+          </p:nvPr>
+        </p:nvSpPr>
+        <p:spPr/>
+        <p:txBody>
+          <a:bodyPr/>
+          <a:lstStyle/>
+          <a:p>
+            <a:r>
+              <a:t>T-086. If there is one thing to take away, it is this slide. The last bullet is the sharpest fact in the project and the easiest to rush.</a:t>
+            </a:r>
+          </a:p>
+        </p:txBody>
+      </p:sp>
+      <p:sp>
+        <p:nvSpPr>
+          <p:cNvPr id="4" name="Slide Number Placeholder 3"/>
+          <p:cNvSpPr>
+            <a:spLocks noGrp="1"/>
+          </p:cNvSpPr>
+          <p:nvPr>
+            <p:ph type="sldNum" idx="5" sz="quarter"/>
+          </p:nvPr>
+        </p:nvSpPr>
+        <p:spPr/>
+      </p:sp>
+    </p:spTree>
+  </p:cSld>
+  <p:clrMapOvr>
+    <a:masterClrMapping/>
+  </p:clrMapOvr>
+</p:notes>
+</file>
+
+<file path=ppt/notesSlides/notesSlide11.xml><?xml version="1.0" encoding="utf-8"?>
+<p:notes xmlns:a="http://schemas.openxmlformats.org/drawingml/2006/main" xmlns:p="http://schemas.openxmlformats.org/presentationml/2006/main" xmlns:r="http://schemas.openxmlformats.org/officeDocument/2006/relationships">
+  <p:cSld>
+    <p:spTree>
+      <p:nvGrpSpPr>
+        <p:cNvPr id="1" name=""/>
+        <p:cNvGrpSpPr/>
+        <p:nvPr/>
+      </p:nvGrpSpPr>
+      <p:grpSpPr>
+        <a:xfrm>
+          <a:off x="0" y="0"/>
+          <a:ext cx="0" cy="0"/>
+          <a:chOff x="0" y="0"/>
+          <a:chExt cx="0" cy="0"/>
+        </a:xfrm>
+      </p:grpSpPr>
+      <p:sp>
+        <p:nvSpPr>
+          <p:cNvPr id="2" name="Slide Image Placeholder 1"/>
+          <p:cNvSpPr>
+            <a:spLocks noGrp="1"/>
+          </p:cNvSpPr>
+          <p:nvPr>
+            <p:ph type="sldImg" idx="2"/>
+          </p:nvPr>
+        </p:nvSpPr>
+        <p:spPr/>
+      </p:sp>
+      <p:sp>
+        <p:nvSpPr>
+          <p:cNvPr id="3" name="Notes Placeholder 2"/>
+          <p:cNvSpPr>
+            <a:spLocks noGrp="1"/>
+          </p:cNvSpPr>
+          <p:nvPr>
+            <p:ph type="body" idx="3" sz="quarter"/>
+          </p:nvPr>
+        </p:nvSpPr>
+        <p:spPr/>
+        <p:txBody>
+          <a:bodyPr/>
+          <a:lstStyle/>
+          <a:p>
+            <a:r>
+              <a:t>§7 and §8 of the paper. Ask directly; do not hedge. Silence is also feedback.</a:t>
+            </a:r>
+          </a:p>
+        </p:txBody>
+      </p:sp>
+      <p:sp>
+        <p:nvSpPr>
+          <p:cNvPr id="4" name="Slide Number Placeholder 3"/>
+          <p:cNvSpPr>
+            <a:spLocks noGrp="1"/>
+          </p:cNvSpPr>
+          <p:nvPr>
+            <p:ph type="sldNum" idx="5" sz="quarter"/>
+          </p:nvPr>
+        </p:nvSpPr>
+        <p:spPr/>
+      </p:sp>
+    </p:spTree>
+  </p:cSld>
+  <p:clrMapOvr>
+    <a:masterClrMapping/>
+  </p:clrMapOvr>
+</p:notes>
+</file>
+
 <file path=ppt/notesSlides/notesSlide2.xml><?xml version="1.0" encoding="utf-8"?>
 <p:notes xmlns:a="http://schemas.openxmlformats.org/drawingml/2006/main" xmlns:p="http://schemas.openxmlformats.org/presentationml/2006/main" xmlns:r="http://schemas.openxmlformats.org/officeDocument/2006/relationships">
   <p:cSld>
@@ -1070,7 +1212,7 @@
           <a:lstStyle/>
           <a:p>
             <a:r>
-              <a:t>§7 and §8 of the paper. Ask directly; do not hedge. Silence is also feedback.</a:t>
+              <a:t>This slide is the argument for the negative results. Do NOT let the two lists blur: a record that mixes elimination with self-inflicted cost earns credit for neither. §5.1 of the paper.</a:t>
             </a:r>
           </a:p>
         </p:txBody>
@@ -4303,6 +4445,1306 @@
 </p:sld>
 </file>
 
+<file path=ppt/slides/slide10.xml><?xml version="1.0" encoding="utf-8"?>
+<p:sld xmlns:a="http://schemas.openxmlformats.org/drawingml/2006/main" xmlns:p="http://schemas.openxmlformats.org/presentationml/2006/main" xmlns:r="http://schemas.openxmlformats.org/officeDocument/2006/relationships">
+  <p:cSld>
+    <p:bg>
+      <p:bgPr>
+        <a:solidFill>
+          <a:srgbClr val="0F1320"/>
+        </a:solidFill>
+        <a:effectLst/>
+      </p:bgPr>
+    </p:bg>
+    <p:spTree>
+      <p:nvGrpSpPr>
+        <p:cNvPr id="1" name=""/>
+        <p:cNvGrpSpPr/>
+        <p:nvPr/>
+      </p:nvGrpSpPr>
+      <p:grpSpPr/>
+      <p:sp>
+        <p:nvSpPr>
+          <p:cNvPr id="2" name="Rectangle 1"/>
+          <p:cNvSpPr/>
+          <p:nvPr/>
+        </p:nvSpPr>
+        <p:spPr>
+          <a:xfrm>
+            <a:off x="0" y="0"/>
+            <a:ext cx="12192000" cy="56000"/>
+          </a:xfrm>
+          <a:prstGeom prst="rect">
+            <a:avLst/>
+          </a:prstGeom>
+          <a:solidFill>
+            <a:srgbClr val="7C9CFF"/>
+          </a:solidFill>
+          <a:ln>
+            <a:noFill/>
+          </a:ln>
+          <a:effectLst/>
+        </p:spPr>
+        <p:style>
+          <a:lnRef idx="1">
+            <a:schemeClr val="accent1"/>
+          </a:lnRef>
+          <a:fillRef idx="3">
+            <a:schemeClr val="accent1"/>
+          </a:fillRef>
+          <a:effectRef idx="2">
+            <a:schemeClr val="accent1"/>
+          </a:effectRef>
+          <a:fontRef idx="minor">
+            <a:schemeClr val="lt1"/>
+          </a:fontRef>
+        </p:style>
+        <p:txBody>
+          <a:bodyPr rtlCol="0" anchor="ctr"/>
+          <a:lstStyle/>
+          <a:p>
+            <a:pPr algn="ctr"/>
+          </a:p>
+        </p:txBody>
+      </p:sp>
+      <p:sp>
+        <p:nvSpPr>
+          <p:cNvPr id="3" name="Rounded Rectangle 2"/>
+          <p:cNvSpPr/>
+          <p:nvPr/>
+        </p:nvSpPr>
+        <p:spPr>
+          <a:xfrm>
+            <a:off x="760000" y="430000"/>
+            <a:ext cx="1794000" cy="340000"/>
+          </a:xfrm>
+          <a:prstGeom prst="roundRect">
+            <a:avLst/>
+          </a:prstGeom>
+          <a:solidFill>
+            <a:srgbClr val="1E2540"/>
+          </a:solidFill>
+          <a:ln>
+            <a:noFill/>
+          </a:ln>
+          <a:effectLst/>
+        </p:spPr>
+        <p:style>
+          <a:lnRef idx="1">
+            <a:schemeClr val="accent1"/>
+          </a:lnRef>
+          <a:fillRef idx="3">
+            <a:schemeClr val="accent1"/>
+          </a:fillRef>
+          <a:effectRef idx="2">
+            <a:schemeClr val="accent1"/>
+          </a:effectRef>
+          <a:fontRef idx="minor">
+            <a:schemeClr val="lt1"/>
+          </a:fontRef>
+        </p:style>
+        <p:txBody>
+          <a:bodyPr rtlCol="0" anchor="ctr" tIns="8000" bIns="8000" lIns="120000" rIns="120000"/>
+          <a:lstStyle/>
+          <a:p>
+            <a:pPr algn="ctr"/>
+            <a:r>
+              <a:rPr sz="1200" b="1" i="0">
+                <a:solidFill>
+                  <a:srgbClr val="7C9CFF"/>
+                </a:solidFill>
+                <a:latin typeface="Helvetica Neue"/>
+              </a:rPr>
+              <a:t>§3 · THE BOUNDARY</a:t>
+            </a:r>
+          </a:p>
+        </p:txBody>
+      </p:sp>
+      <p:sp>
+        <p:nvSpPr>
+          <p:cNvPr id="4" name="Rounded Rectangle 3"/>
+          <p:cNvSpPr/>
+          <p:nvPr/>
+        </p:nvSpPr>
+        <p:spPr>
+          <a:xfrm>
+            <a:off x="10834000" y="430000"/>
+            <a:ext cx="598000" cy="340000"/>
+          </a:xfrm>
+          <a:prstGeom prst="roundRect">
+            <a:avLst/>
+          </a:prstGeom>
+          <a:solidFill>
+            <a:srgbClr val="161C2E"/>
+          </a:solidFill>
+          <a:ln>
+            <a:noFill/>
+          </a:ln>
+          <a:effectLst/>
+        </p:spPr>
+        <p:style>
+          <a:lnRef idx="1">
+            <a:schemeClr val="accent1"/>
+          </a:lnRef>
+          <a:fillRef idx="3">
+            <a:schemeClr val="accent1"/>
+          </a:fillRef>
+          <a:effectRef idx="2">
+            <a:schemeClr val="accent1"/>
+          </a:effectRef>
+          <a:fontRef idx="minor">
+            <a:schemeClr val="lt1"/>
+          </a:fontRef>
+        </p:style>
+        <p:txBody>
+          <a:bodyPr rtlCol="0" anchor="ctr" tIns="8000" bIns="8000" lIns="120000" rIns="120000"/>
+          <a:lstStyle/>
+          <a:p>
+            <a:pPr algn="ctr"/>
+            <a:r>
+              <a:rPr sz="1200" b="1" i="0">
+                <a:solidFill>
+                  <a:srgbClr val="8A93A8"/>
+                </a:solidFill>
+                <a:latin typeface="Helvetica Neue"/>
+              </a:rPr>
+              <a:t>⏱ 1m</a:t>
+            </a:r>
+          </a:p>
+        </p:txBody>
+      </p:sp>
+      <p:sp>
+        <p:nvSpPr>
+          <p:cNvPr id="5" name="TextBox 4"/>
+          <p:cNvSpPr txBox="1"/>
+          <p:nvPr/>
+        </p:nvSpPr>
+        <p:spPr>
+          <a:xfrm>
+            <a:off x="760000" y="870000"/>
+            <a:ext cx="10672000" cy="900000"/>
+          </a:xfrm>
+          <a:prstGeom prst="rect">
+            <a:avLst/>
+          </a:prstGeom>
+          <a:noFill/>
+        </p:spPr>
+        <p:txBody>
+          <a:bodyPr wrap="square">
+            <a:spAutoFit/>
+          </a:bodyPr>
+          <a:lstStyle/>
+          <a:p>
+            <a:r>
+              <a:rPr sz="2800" b="1" i="0">
+                <a:solidFill>
+                  <a:srgbClr val="EAECF4"/>
+                </a:solidFill>
+                <a:latin typeface="Helvetica Neue"/>
+              </a:rPr>
+              <a:t>We can say WHICH facts an edit touches. Not how hard.</a:t>
+            </a:r>
+          </a:p>
+        </p:txBody>
+      </p:sp>
+      <p:sp>
+        <p:nvSpPr>
+          <p:cNvPr id="6" name="Rectangle 5"/>
+          <p:cNvSpPr/>
+          <p:nvPr/>
+        </p:nvSpPr>
+        <p:spPr>
+          <a:xfrm>
+            <a:off x="760000" y="1660000"/>
+            <a:ext cx="10672000" cy="15000"/>
+          </a:xfrm>
+          <a:prstGeom prst="rect">
+            <a:avLst/>
+          </a:prstGeom>
+          <a:solidFill>
+            <a:srgbClr val="2A3247"/>
+          </a:solidFill>
+          <a:ln>
+            <a:noFill/>
+          </a:ln>
+          <a:effectLst/>
+        </p:spPr>
+        <p:style>
+          <a:lnRef idx="1">
+            <a:schemeClr val="accent1"/>
+          </a:lnRef>
+          <a:fillRef idx="3">
+            <a:schemeClr val="accent1"/>
+          </a:fillRef>
+          <a:effectRef idx="2">
+            <a:schemeClr val="accent1"/>
+          </a:effectRef>
+          <a:fontRef idx="minor">
+            <a:schemeClr val="lt1"/>
+          </a:fontRef>
+        </p:style>
+        <p:txBody>
+          <a:bodyPr rtlCol="0" anchor="ctr"/>
+          <a:lstStyle/>
+          <a:p>
+            <a:pPr algn="ctr"/>
+          </a:p>
+        </p:txBody>
+      </p:sp>
+      <p:sp>
+        <p:nvSpPr>
+          <p:cNvPr id="7" name="Rectangle 6"/>
+          <p:cNvSpPr/>
+          <p:nvPr/>
+        </p:nvSpPr>
+        <p:spPr>
+          <a:xfrm>
+            <a:off x="760000" y="1636000"/>
+            <a:ext cx="720000" cy="60000"/>
+          </a:xfrm>
+          <a:prstGeom prst="rect">
+            <a:avLst/>
+          </a:prstGeom>
+          <a:solidFill>
+            <a:srgbClr val="7C9CFF"/>
+          </a:solidFill>
+          <a:ln>
+            <a:noFill/>
+          </a:ln>
+          <a:effectLst/>
+        </p:spPr>
+        <p:style>
+          <a:lnRef idx="1">
+            <a:schemeClr val="accent1"/>
+          </a:lnRef>
+          <a:fillRef idx="3">
+            <a:schemeClr val="accent1"/>
+          </a:fillRef>
+          <a:effectRef idx="2">
+            <a:schemeClr val="accent1"/>
+          </a:effectRef>
+          <a:fontRef idx="minor">
+            <a:schemeClr val="lt1"/>
+          </a:fontRef>
+        </p:style>
+        <p:txBody>
+          <a:bodyPr rtlCol="0" anchor="ctr"/>
+          <a:lstStyle/>
+          <a:p>
+            <a:pPr algn="ctr"/>
+          </a:p>
+        </p:txBody>
+      </p:sp>
+      <p:sp>
+        <p:nvSpPr>
+          <p:cNvPr id="8" name="TextBox 7"/>
+          <p:cNvSpPr txBox="1"/>
+          <p:nvPr/>
+        </p:nvSpPr>
+        <p:spPr>
+          <a:xfrm>
+            <a:off x="760000" y="6388000"/>
+            <a:ext cx="10672000" cy="300000"/>
+          </a:xfrm>
+          <a:prstGeom prst="rect">
+            <a:avLst/>
+          </a:prstGeom>
+          <a:noFill/>
+        </p:spPr>
+        <p:txBody>
+          <a:bodyPr wrap="square">
+            <a:spAutoFit/>
+          </a:bodyPr>
+          <a:lstStyle/>
+          <a:p>
+            <a:r>
+              <a:rPr sz="1000" b="0" i="0">
+                <a:solidFill>
+                  <a:srgbClr val="8A93A8"/>
+                </a:solidFill>
+                <a:latin typeface="Helvetica Neue"/>
+              </a:rPr>
+              <a:t>edit-slice · what an edit really moves</a:t>
+            </a:r>
+          </a:p>
+        </p:txBody>
+      </p:sp>
+      <p:sp>
+        <p:nvSpPr>
+          <p:cNvPr id="9" name="TextBox 8"/>
+          <p:cNvSpPr txBox="1"/>
+          <p:nvPr/>
+        </p:nvSpPr>
+        <p:spPr>
+          <a:xfrm>
+            <a:off x="760000" y="6388000"/>
+            <a:ext cx="10672000" cy="300000"/>
+          </a:xfrm>
+          <a:prstGeom prst="rect">
+            <a:avLst/>
+          </a:prstGeom>
+          <a:noFill/>
+        </p:spPr>
+        <p:txBody>
+          <a:bodyPr wrap="square">
+            <a:spAutoFit/>
+          </a:bodyPr>
+          <a:lstStyle/>
+          <a:p>
+            <a:pPr algn="r"/>
+            <a:r>
+              <a:rPr sz="1000" b="0" i="0">
+                <a:solidFill>
+                  <a:srgbClr val="8A93A8"/>
+                </a:solidFill>
+                <a:latin typeface="Helvetica Neue"/>
+              </a:rPr>
+              <a:t>10 / 11</a:t>
+            </a:r>
+          </a:p>
+        </p:txBody>
+      </p:sp>
+      <p:sp>
+        <p:nvSpPr>
+          <p:cNvPr id="10" name="Rectangle 9"/>
+          <p:cNvSpPr/>
+          <p:nvPr/>
+        </p:nvSpPr>
+        <p:spPr>
+          <a:xfrm>
+            <a:off x="0" y="6812000"/>
+            <a:ext cx="12192000" cy="46000"/>
+          </a:xfrm>
+          <a:prstGeom prst="rect">
+            <a:avLst/>
+          </a:prstGeom>
+          <a:solidFill>
+            <a:srgbClr val="1E2540"/>
+          </a:solidFill>
+          <a:ln>
+            <a:noFill/>
+          </a:ln>
+          <a:effectLst/>
+        </p:spPr>
+        <p:style>
+          <a:lnRef idx="1">
+            <a:schemeClr val="accent1"/>
+          </a:lnRef>
+          <a:fillRef idx="3">
+            <a:schemeClr val="accent1"/>
+          </a:fillRef>
+          <a:effectRef idx="2">
+            <a:schemeClr val="accent1"/>
+          </a:effectRef>
+          <a:fontRef idx="minor">
+            <a:schemeClr val="lt1"/>
+          </a:fontRef>
+        </p:style>
+        <p:txBody>
+          <a:bodyPr rtlCol="0" anchor="ctr"/>
+          <a:lstStyle/>
+          <a:p>
+            <a:pPr algn="ctr"/>
+          </a:p>
+        </p:txBody>
+      </p:sp>
+      <p:sp>
+        <p:nvSpPr>
+          <p:cNvPr id="11" name="Rectangle 10"/>
+          <p:cNvSpPr/>
+          <p:nvPr/>
+        </p:nvSpPr>
+        <p:spPr>
+          <a:xfrm>
+            <a:off x="0" y="6812000"/>
+            <a:ext cx="11083636" cy="46000"/>
+          </a:xfrm>
+          <a:prstGeom prst="rect">
+            <a:avLst/>
+          </a:prstGeom>
+          <a:solidFill>
+            <a:srgbClr val="7C9CFF"/>
+          </a:solidFill>
+          <a:ln>
+            <a:noFill/>
+          </a:ln>
+          <a:effectLst/>
+        </p:spPr>
+        <p:style>
+          <a:lnRef idx="1">
+            <a:schemeClr val="accent1"/>
+          </a:lnRef>
+          <a:fillRef idx="3">
+            <a:schemeClr val="accent1"/>
+          </a:fillRef>
+          <a:effectRef idx="2">
+            <a:schemeClr val="accent1"/>
+          </a:effectRef>
+          <a:fontRef idx="minor">
+            <a:schemeClr val="lt1"/>
+          </a:fontRef>
+        </p:style>
+        <p:txBody>
+          <a:bodyPr rtlCol="0" anchor="ctr"/>
+          <a:lstStyle/>
+          <a:p>
+            <a:pPr algn="ctr"/>
+          </a:p>
+        </p:txBody>
+      </p:sp>
+      <p:sp>
+        <p:nvSpPr>
+          <p:cNvPr id="12" name="TextBox 11"/>
+          <p:cNvSpPr txBox="1"/>
+          <p:nvPr/>
+        </p:nvSpPr>
+        <p:spPr>
+          <a:xfrm>
+            <a:off x="760000" y="2650000"/>
+            <a:ext cx="10672000" cy="2000000"/>
+          </a:xfrm>
+          <a:prstGeom prst="rect">
+            <a:avLst/>
+          </a:prstGeom>
+          <a:noFill/>
+        </p:spPr>
+        <p:txBody>
+          <a:bodyPr wrap="square">
+            <a:spAutoFit/>
+          </a:bodyPr>
+          <a:lstStyle/>
+          <a:p>
+            <a:pPr algn="ctr">
+              <a:lnSpc>
+                <a:spcPct val="120000"/>
+              </a:lnSpc>
+            </a:pPr>
+            <a:r>
+              <a:rPr sz="2400" b="0" i="0">
+                <a:solidFill>
+                  <a:srgbClr val="EAECF4"/>
+                </a:solidFill>
+                <a:latin typeface="Helvetica Neue"/>
+              </a:rPr>
+              <a:t>which — yes.   how hard — no.</a:t>
+            </a:r>
+          </a:p>
+        </p:txBody>
+      </p:sp>
+      <p:sp>
+        <p:nvSpPr>
+          <p:cNvPr id="13" name="TextBox 12"/>
+          <p:cNvSpPr txBox="1"/>
+          <p:nvPr/>
+        </p:nvSpPr>
+        <p:spPr>
+          <a:xfrm>
+            <a:off x="760000" y="1900000"/>
+            <a:ext cx="10672000" cy="4398000"/>
+          </a:xfrm>
+          <a:prstGeom prst="rect">
+            <a:avLst/>
+          </a:prstGeom>
+          <a:noFill/>
+        </p:spPr>
+        <p:txBody>
+          <a:bodyPr wrap="square">
+            <a:spAutoFit/>
+          </a:bodyPr>
+          <a:lstStyle/>
+          <a:p>
+            <a:pPr>
+              <a:lnSpc>
+                <a:spcPct val="108000"/>
+              </a:lnSpc>
+              <a:spcAft>
+                <a:spcPts val="800"/>
+              </a:spcAft>
+            </a:pPr>
+            <a:r>
+              <a:rPr sz="1800" b="0" i="0">
+                <a:solidFill>
+                  <a:srgbClr val="7C9CFF"/>
+                </a:solidFill>
+                <a:latin typeface="Helvetica Neue"/>
+              </a:rPr>
+              <a:t>●  </a:t>
+            </a:r>
+            <a:r>
+              <a:rPr sz="1800" b="1" i="0">
+                <a:solidFill>
+                  <a:srgbClr val="6FD39A"/>
+                </a:solidFill>
+                <a:latin typeface="Helvetica Neue"/>
+              </a:rPr>
+              <a:t>WHICH is settled</a:t>
+            </a:r>
+            <a:r>
+              <a:rPr sz="1800" b="0" i="0">
+                <a:solidFill>
+                  <a:srgbClr val="EAECF4"/>
+                </a:solidFill>
+                <a:latin typeface="Helvetica Neue"/>
+              </a:rPr>
+              <a:t> — cheaply, exactly, at every size from 6B to 405B. And the probe hit hardest is the one whose answer is the same </a:t>
+            </a:r>
+            <a:r>
+              <a:rPr sz="1800" b="1" i="0">
+                <a:solidFill>
+                  <a:srgbClr val="EAECF4"/>
+                </a:solidFill>
+                <a:latin typeface="Helvetica Neue"/>
+              </a:rPr>
+              <a:t>kind of thing</a:t>
+            </a:r>
+            <a:r>
+              <a:rPr sz="1800" b="0" i="0">
+                <a:solidFill>
+                  <a:srgbClr val="EAECF4"/>
+                </a:solidFill>
+                <a:latin typeface="Helvetica Neue"/>
+              </a:rPr>
+              <a:t> as what was injected. Six cases out of six.</a:t>
+            </a:r>
+          </a:p>
+          <a:p>
+            <a:pPr>
+              <a:lnSpc>
+                <a:spcPct val="108000"/>
+              </a:lnSpc>
+              <a:spcAft>
+                <a:spcPts val="800"/>
+              </a:spcAft>
+            </a:pPr>
+            <a:r>
+              <a:rPr sz="1800" b="0" i="0">
+                <a:solidFill>
+                  <a:srgbClr val="7C9CFF"/>
+                </a:solidFill>
+                <a:latin typeface="Helvetica Neue"/>
+              </a:rPr>
+              <a:t>●  </a:t>
+            </a:r>
+            <a:r>
+              <a:rPr sz="1800" b="1" i="0">
+                <a:solidFill>
+                  <a:srgbClr val="F58AA0"/>
+                </a:solidFill>
+                <a:latin typeface="Helvetica Neue"/>
+              </a:rPr>
+              <a:t>HOW HARD is open</a:t>
+            </a:r>
+            <a:r>
+              <a:rPr sz="1800" b="0" i="0">
+                <a:solidFill>
+                  <a:srgbClr val="EAECF4"/>
+                </a:solidFill>
+                <a:latin typeface="Helvetica Neue"/>
+              </a:rPr>
+              <a:t> — nothing we have predicts it. The two best candidates explain about a fifth of the variation each.</a:t>
+            </a:r>
+          </a:p>
+          <a:p>
+            <a:pPr lvl="1">
+              <a:lnSpc>
+                <a:spcPct val="108000"/>
+              </a:lnSpc>
+              <a:spcAft>
+                <a:spcPts val="500"/>
+              </a:spcAft>
+            </a:pPr>
+            <a:r>
+              <a:rPr sz="1600" b="0" i="0">
+                <a:solidFill>
+                  <a:srgbClr val="8A93A8"/>
+                </a:solidFill>
+                <a:latin typeface="Helvetica Neue"/>
+              </a:rPr>
+              <a:t>    –  </a:t>
+            </a:r>
+            <a:r>
+              <a:rPr sz="1600" b="0" i="0">
+                <a:solidFill>
+                  <a:srgbClr val="8A93A8"/>
+                </a:solidFill>
+                <a:latin typeface="Helvetica Neue"/>
+              </a:rPr>
+              <a:t>And the measurement this whole project is built on cannot help: it has </a:t>
+            </a:r>
+            <a:r>
+              <a:rPr sz="1600" b="1" i="0">
+                <a:solidFill>
+                  <a:srgbClr val="EAECF4"/>
+                </a:solidFill>
+                <a:latin typeface="Helvetica Neue"/>
+              </a:rPr>
+              <a:t>exactly the same value</a:t>
+            </a:r>
+            <a:r>
+              <a:rPr sz="1600" b="0" i="0">
+                <a:solidFill>
+                  <a:srgbClr val="8A93A8"/>
+                </a:solidFill>
+                <a:latin typeface="Helvetica Neue"/>
+              </a:rPr>
+              <a:t> for every probe whose outcome differs. Zero variance where the answer varies most.</a:t>
+            </a:r>
+          </a:p>
+          <a:p>
+            <a:pPr>
+              <a:lnSpc>
+                <a:spcPct val="108000"/>
+              </a:lnSpc>
+              <a:spcAft>
+                <a:spcPts val="800"/>
+              </a:spcAft>
+            </a:pPr>
+            <a:r>
+              <a:rPr sz="1800" b="0" i="0">
+                <a:solidFill>
+                  <a:srgbClr val="7C9CFF"/>
+                </a:solidFill>
+                <a:latin typeface="Helvetica Neue"/>
+              </a:rPr>
+              <a:t>●  </a:t>
+            </a:r>
+            <a:r>
+              <a:rPr sz="1800" b="0" i="0">
+                <a:solidFill>
+                  <a:srgbClr val="EAECF4"/>
+                </a:solidFill>
+                <a:latin typeface="Helvetica Neue"/>
+              </a:rPr>
+              <a:t>That is a real boundary, it came entirely from things not working, and the question past it is the one I would most like help with.</a:t>
+            </a:r>
+          </a:p>
+        </p:txBody>
+      </p:sp>
+    </p:spTree>
+  </p:cSld>
+  <p:clrMapOvr>
+    <a:masterClrMapping/>
+  </p:clrMapOvr>
+</p:sld>
+</file>
+
+<file path=ppt/slides/slide11.xml><?xml version="1.0" encoding="utf-8"?>
+<p:sld xmlns:a="http://schemas.openxmlformats.org/drawingml/2006/main" xmlns:p="http://schemas.openxmlformats.org/presentationml/2006/main" xmlns:r="http://schemas.openxmlformats.org/officeDocument/2006/relationships">
+  <p:cSld>
+    <p:bg>
+      <p:bgPr>
+        <a:solidFill>
+          <a:srgbClr val="0F1320"/>
+        </a:solidFill>
+        <a:effectLst/>
+      </p:bgPr>
+    </p:bg>
+    <p:spTree>
+      <p:nvGrpSpPr>
+        <p:cNvPr id="1" name=""/>
+        <p:cNvGrpSpPr/>
+        <p:nvPr/>
+      </p:nvGrpSpPr>
+      <p:grpSpPr/>
+      <p:sp>
+        <p:nvSpPr>
+          <p:cNvPr id="2" name="Rectangle 1"/>
+          <p:cNvSpPr/>
+          <p:nvPr/>
+        </p:nvSpPr>
+        <p:spPr>
+          <a:xfrm>
+            <a:off x="0" y="0"/>
+            <a:ext cx="12192000" cy="56000"/>
+          </a:xfrm>
+          <a:prstGeom prst="rect">
+            <a:avLst/>
+          </a:prstGeom>
+          <a:solidFill>
+            <a:srgbClr val="7C9CFF"/>
+          </a:solidFill>
+          <a:ln>
+            <a:noFill/>
+          </a:ln>
+          <a:effectLst/>
+        </p:spPr>
+        <p:style>
+          <a:lnRef idx="1">
+            <a:schemeClr val="accent1"/>
+          </a:lnRef>
+          <a:fillRef idx="3">
+            <a:schemeClr val="accent1"/>
+          </a:fillRef>
+          <a:effectRef idx="2">
+            <a:schemeClr val="accent1"/>
+          </a:effectRef>
+          <a:fontRef idx="minor">
+            <a:schemeClr val="lt1"/>
+          </a:fontRef>
+        </p:style>
+        <p:txBody>
+          <a:bodyPr rtlCol="0" anchor="ctr"/>
+          <a:lstStyle/>
+          <a:p>
+            <a:pPr algn="ctr"/>
+          </a:p>
+        </p:txBody>
+      </p:sp>
+      <p:sp>
+        <p:nvSpPr>
+          <p:cNvPr id="3" name="Rounded Rectangle 2"/>
+          <p:cNvSpPr/>
+          <p:nvPr/>
+        </p:nvSpPr>
+        <p:spPr>
+          <a:xfrm>
+            <a:off x="760000" y="430000"/>
+            <a:ext cx="1702000" cy="340000"/>
+          </a:xfrm>
+          <a:prstGeom prst="roundRect">
+            <a:avLst/>
+          </a:prstGeom>
+          <a:solidFill>
+            <a:srgbClr val="1E2540"/>
+          </a:solidFill>
+          <a:ln>
+            <a:noFill/>
+          </a:ln>
+          <a:effectLst/>
+        </p:spPr>
+        <p:style>
+          <a:lnRef idx="1">
+            <a:schemeClr val="accent1"/>
+          </a:lnRef>
+          <a:fillRef idx="3">
+            <a:schemeClr val="accent1"/>
+          </a:fillRef>
+          <a:effectRef idx="2">
+            <a:schemeClr val="accent1"/>
+          </a:effectRef>
+          <a:fontRef idx="minor">
+            <a:schemeClr val="lt1"/>
+          </a:fontRef>
+        </p:style>
+        <p:txBody>
+          <a:bodyPr rtlCol="0" anchor="ctr" tIns="8000" bIns="8000" lIns="120000" rIns="120000"/>
+          <a:lstStyle/>
+          <a:p>
+            <a:pPr algn="ctr"/>
+            <a:r>
+              <a:rPr sz="1200" b="1" i="0">
+                <a:solidFill>
+                  <a:srgbClr val="7C9CFF"/>
+                </a:solidFill>
+                <a:latin typeface="Helvetica Neue"/>
+              </a:rPr>
+              <a:t>§4 · WHAT I WANT</a:t>
+            </a:r>
+          </a:p>
+        </p:txBody>
+      </p:sp>
+      <p:sp>
+        <p:nvSpPr>
+          <p:cNvPr id="4" name="Rounded Rectangle 3"/>
+          <p:cNvSpPr/>
+          <p:nvPr/>
+        </p:nvSpPr>
+        <p:spPr>
+          <a:xfrm>
+            <a:off x="10834000" y="430000"/>
+            <a:ext cx="598000" cy="340000"/>
+          </a:xfrm>
+          <a:prstGeom prst="roundRect">
+            <a:avLst/>
+          </a:prstGeom>
+          <a:solidFill>
+            <a:srgbClr val="161C2E"/>
+          </a:solidFill>
+          <a:ln>
+            <a:noFill/>
+          </a:ln>
+          <a:effectLst/>
+        </p:spPr>
+        <p:style>
+          <a:lnRef idx="1">
+            <a:schemeClr val="accent1"/>
+          </a:lnRef>
+          <a:fillRef idx="3">
+            <a:schemeClr val="accent1"/>
+          </a:fillRef>
+          <a:effectRef idx="2">
+            <a:schemeClr val="accent1"/>
+          </a:effectRef>
+          <a:fontRef idx="minor">
+            <a:schemeClr val="lt1"/>
+          </a:fontRef>
+        </p:style>
+        <p:txBody>
+          <a:bodyPr rtlCol="0" anchor="ctr" tIns="8000" bIns="8000" lIns="120000" rIns="120000"/>
+          <a:lstStyle/>
+          <a:p>
+            <a:pPr algn="ctr"/>
+            <a:r>
+              <a:rPr sz="1200" b="1" i="0">
+                <a:solidFill>
+                  <a:srgbClr val="8A93A8"/>
+                </a:solidFill>
+                <a:latin typeface="Helvetica Neue"/>
+              </a:rPr>
+              <a:t>⏱ 1m</a:t>
+            </a:r>
+          </a:p>
+        </p:txBody>
+      </p:sp>
+      <p:sp>
+        <p:nvSpPr>
+          <p:cNvPr id="5" name="TextBox 4"/>
+          <p:cNvSpPr txBox="1"/>
+          <p:nvPr/>
+        </p:nvSpPr>
+        <p:spPr>
+          <a:xfrm>
+            <a:off x="760000" y="870000"/>
+            <a:ext cx="10672000" cy="900000"/>
+          </a:xfrm>
+          <a:prstGeom prst="rect">
+            <a:avLst/>
+          </a:prstGeom>
+          <a:noFill/>
+        </p:spPr>
+        <p:txBody>
+          <a:bodyPr wrap="square">
+            <a:spAutoFit/>
+          </a:bodyPr>
+          <a:lstStyle/>
+          <a:p>
+            <a:r>
+              <a:rPr sz="2800" b="1" i="0">
+                <a:solidFill>
+                  <a:srgbClr val="EAECF4"/>
+                </a:solidFill>
+                <a:latin typeface="Helvetica Neue"/>
+              </a:rPr>
+              <a:t>Three things I cannot decide from inside</a:t>
+            </a:r>
+          </a:p>
+        </p:txBody>
+      </p:sp>
+      <p:sp>
+        <p:nvSpPr>
+          <p:cNvPr id="6" name="Rectangle 5"/>
+          <p:cNvSpPr/>
+          <p:nvPr/>
+        </p:nvSpPr>
+        <p:spPr>
+          <a:xfrm>
+            <a:off x="760000" y="1660000"/>
+            <a:ext cx="10672000" cy="15000"/>
+          </a:xfrm>
+          <a:prstGeom prst="rect">
+            <a:avLst/>
+          </a:prstGeom>
+          <a:solidFill>
+            <a:srgbClr val="2A3247"/>
+          </a:solidFill>
+          <a:ln>
+            <a:noFill/>
+          </a:ln>
+          <a:effectLst/>
+        </p:spPr>
+        <p:style>
+          <a:lnRef idx="1">
+            <a:schemeClr val="accent1"/>
+          </a:lnRef>
+          <a:fillRef idx="3">
+            <a:schemeClr val="accent1"/>
+          </a:fillRef>
+          <a:effectRef idx="2">
+            <a:schemeClr val="accent1"/>
+          </a:effectRef>
+          <a:fontRef idx="minor">
+            <a:schemeClr val="lt1"/>
+          </a:fontRef>
+        </p:style>
+        <p:txBody>
+          <a:bodyPr rtlCol="0" anchor="ctr"/>
+          <a:lstStyle/>
+          <a:p>
+            <a:pPr algn="ctr"/>
+          </a:p>
+        </p:txBody>
+      </p:sp>
+      <p:sp>
+        <p:nvSpPr>
+          <p:cNvPr id="7" name="Rectangle 6"/>
+          <p:cNvSpPr/>
+          <p:nvPr/>
+        </p:nvSpPr>
+        <p:spPr>
+          <a:xfrm>
+            <a:off x="760000" y="1636000"/>
+            <a:ext cx="720000" cy="60000"/>
+          </a:xfrm>
+          <a:prstGeom prst="rect">
+            <a:avLst/>
+          </a:prstGeom>
+          <a:solidFill>
+            <a:srgbClr val="7C9CFF"/>
+          </a:solidFill>
+          <a:ln>
+            <a:noFill/>
+          </a:ln>
+          <a:effectLst/>
+        </p:spPr>
+        <p:style>
+          <a:lnRef idx="1">
+            <a:schemeClr val="accent1"/>
+          </a:lnRef>
+          <a:fillRef idx="3">
+            <a:schemeClr val="accent1"/>
+          </a:fillRef>
+          <a:effectRef idx="2">
+            <a:schemeClr val="accent1"/>
+          </a:effectRef>
+          <a:fontRef idx="minor">
+            <a:schemeClr val="lt1"/>
+          </a:fontRef>
+        </p:style>
+        <p:txBody>
+          <a:bodyPr rtlCol="0" anchor="ctr"/>
+          <a:lstStyle/>
+          <a:p>
+            <a:pPr algn="ctr"/>
+          </a:p>
+        </p:txBody>
+      </p:sp>
+      <p:sp>
+        <p:nvSpPr>
+          <p:cNvPr id="8" name="TextBox 7"/>
+          <p:cNvSpPr txBox="1"/>
+          <p:nvPr/>
+        </p:nvSpPr>
+        <p:spPr>
+          <a:xfrm>
+            <a:off x="760000" y="6388000"/>
+            <a:ext cx="10672000" cy="300000"/>
+          </a:xfrm>
+          <a:prstGeom prst="rect">
+            <a:avLst/>
+          </a:prstGeom>
+          <a:noFill/>
+        </p:spPr>
+        <p:txBody>
+          <a:bodyPr wrap="square">
+            <a:spAutoFit/>
+          </a:bodyPr>
+          <a:lstStyle/>
+          <a:p>
+            <a:r>
+              <a:rPr sz="1000" b="0" i="0">
+                <a:solidFill>
+                  <a:srgbClr val="8A93A8"/>
+                </a:solidFill>
+                <a:latin typeface="Helvetica Neue"/>
+              </a:rPr>
+              <a:t>edit-slice · what an edit really moves</a:t>
+            </a:r>
+          </a:p>
+        </p:txBody>
+      </p:sp>
+      <p:sp>
+        <p:nvSpPr>
+          <p:cNvPr id="9" name="TextBox 8"/>
+          <p:cNvSpPr txBox="1"/>
+          <p:nvPr/>
+        </p:nvSpPr>
+        <p:spPr>
+          <a:xfrm>
+            <a:off x="760000" y="6388000"/>
+            <a:ext cx="10672000" cy="300000"/>
+          </a:xfrm>
+          <a:prstGeom prst="rect">
+            <a:avLst/>
+          </a:prstGeom>
+          <a:noFill/>
+        </p:spPr>
+        <p:txBody>
+          <a:bodyPr wrap="square">
+            <a:spAutoFit/>
+          </a:bodyPr>
+          <a:lstStyle/>
+          <a:p>
+            <a:pPr algn="r"/>
+            <a:r>
+              <a:rPr sz="1000" b="0" i="0">
+                <a:solidFill>
+                  <a:srgbClr val="8A93A8"/>
+                </a:solidFill>
+                <a:latin typeface="Helvetica Neue"/>
+              </a:rPr>
+              <a:t>11 / 11</a:t>
+            </a:r>
+          </a:p>
+        </p:txBody>
+      </p:sp>
+      <p:sp>
+        <p:nvSpPr>
+          <p:cNvPr id="10" name="Rectangle 9"/>
+          <p:cNvSpPr/>
+          <p:nvPr/>
+        </p:nvSpPr>
+        <p:spPr>
+          <a:xfrm>
+            <a:off x="0" y="6812000"/>
+            <a:ext cx="12192000" cy="46000"/>
+          </a:xfrm>
+          <a:prstGeom prst="rect">
+            <a:avLst/>
+          </a:prstGeom>
+          <a:solidFill>
+            <a:srgbClr val="1E2540"/>
+          </a:solidFill>
+          <a:ln>
+            <a:noFill/>
+          </a:ln>
+          <a:effectLst/>
+        </p:spPr>
+        <p:style>
+          <a:lnRef idx="1">
+            <a:schemeClr val="accent1"/>
+          </a:lnRef>
+          <a:fillRef idx="3">
+            <a:schemeClr val="accent1"/>
+          </a:fillRef>
+          <a:effectRef idx="2">
+            <a:schemeClr val="accent1"/>
+          </a:effectRef>
+          <a:fontRef idx="minor">
+            <a:schemeClr val="lt1"/>
+          </a:fontRef>
+        </p:style>
+        <p:txBody>
+          <a:bodyPr rtlCol="0" anchor="ctr"/>
+          <a:lstStyle/>
+          <a:p>
+            <a:pPr algn="ctr"/>
+          </a:p>
+        </p:txBody>
+      </p:sp>
+      <p:sp>
+        <p:nvSpPr>
+          <p:cNvPr id="11" name="Rectangle 10"/>
+          <p:cNvSpPr/>
+          <p:nvPr/>
+        </p:nvSpPr>
+        <p:spPr>
+          <a:xfrm>
+            <a:off x="0" y="6812000"/>
+            <a:ext cx="12192000" cy="46000"/>
+          </a:xfrm>
+          <a:prstGeom prst="rect">
+            <a:avLst/>
+          </a:prstGeom>
+          <a:solidFill>
+            <a:srgbClr val="7C9CFF"/>
+          </a:solidFill>
+          <a:ln>
+            <a:noFill/>
+          </a:ln>
+          <a:effectLst/>
+        </p:spPr>
+        <p:style>
+          <a:lnRef idx="1">
+            <a:schemeClr val="accent1"/>
+          </a:lnRef>
+          <a:fillRef idx="3">
+            <a:schemeClr val="accent1"/>
+          </a:fillRef>
+          <a:effectRef idx="2">
+            <a:schemeClr val="accent1"/>
+          </a:effectRef>
+          <a:fontRef idx="minor">
+            <a:schemeClr val="lt1"/>
+          </a:fontRef>
+        </p:style>
+        <p:txBody>
+          <a:bodyPr rtlCol="0" anchor="ctr"/>
+          <a:lstStyle/>
+          <a:p>
+            <a:pPr algn="ctr"/>
+          </a:p>
+        </p:txBody>
+      </p:sp>
+      <p:sp>
+        <p:nvSpPr>
+          <p:cNvPr id="12" name="TextBox 11"/>
+          <p:cNvSpPr txBox="1"/>
+          <p:nvPr/>
+        </p:nvSpPr>
+        <p:spPr>
+          <a:xfrm>
+            <a:off x="760000" y="1900000"/>
+            <a:ext cx="10672000" cy="4398000"/>
+          </a:xfrm>
+          <a:prstGeom prst="rect">
+            <a:avLst/>
+          </a:prstGeom>
+          <a:noFill/>
+        </p:spPr>
+        <p:txBody>
+          <a:bodyPr wrap="square">
+            <a:spAutoFit/>
+          </a:bodyPr>
+          <a:lstStyle/>
+          <a:p>
+            <a:pPr>
+              <a:lnSpc>
+                <a:spcPct val="108000"/>
+              </a:lnSpc>
+              <a:spcAft>
+                <a:spcPts val="800"/>
+              </a:spcAft>
+            </a:pPr>
+            <a:r>
+              <a:rPr sz="1800" b="0" i="0">
+                <a:solidFill>
+                  <a:srgbClr val="7C9CFF"/>
+                </a:solidFill>
+                <a:latin typeface="Helvetica Neue"/>
+              </a:rPr>
+              <a:t>●  </a:t>
+            </a:r>
+            <a:r>
+              <a:rPr sz="1800" b="1" i="0">
+                <a:solidFill>
+                  <a:srgbClr val="EAECF4"/>
+                </a:solidFill>
+                <a:latin typeface="Helvetica Neue"/>
+              </a:rPr>
+              <a:t>Is the main result already known?</a:t>
+            </a:r>
+            <a:r>
+              <a:rPr sz="1800" b="0" i="0">
+                <a:solidFill>
+                  <a:srgbClr val="EAECF4"/>
+                </a:solidFill>
+                <a:latin typeface="Helvetica Neue"/>
+              </a:rPr>
+              <a:t> It is a line of arithmetic. Practitioners may simply assume it, and 'we could not find it stated' is the weakest form of a novelty claim.</a:t>
+            </a:r>
+          </a:p>
+          <a:p>
+            <a:pPr>
+              <a:lnSpc>
+                <a:spcPct val="108000"/>
+              </a:lnSpc>
+              <a:spcAft>
+                <a:spcPts val="800"/>
+              </a:spcAft>
+            </a:pPr>
+            <a:r>
+              <a:rPr sz="1800" b="0" i="0">
+                <a:solidFill>
+                  <a:srgbClr val="7C9CFF"/>
+                </a:solidFill>
+                <a:latin typeface="Helvetica Neue"/>
+              </a:rPr>
+              <a:t>●  </a:t>
+            </a:r>
+            <a:r>
+              <a:rPr sz="1800" b="1" i="0">
+                <a:solidFill>
+                  <a:srgbClr val="EAECF4"/>
+                </a:solidFill>
+                <a:latin typeface="Helvetica Neue"/>
+              </a:rPr>
+              <a:t>Is the benchmark consequence worth a week?</a:t>
+            </a:r>
+            <a:r>
+              <a:rPr sz="1800" b="0" i="0">
+                <a:solidFill>
+                  <a:srgbClr val="EAECF4"/>
+                </a:solidFill>
+                <a:latin typeface="Helvetica Neue"/>
+              </a:rPr>
+              <a:t> Re-scoring one published test with the names moved is the only thing here that changes what others do.</a:t>
+            </a:r>
+          </a:p>
+          <a:p>
+            <a:pPr>
+              <a:lnSpc>
+                <a:spcPct val="108000"/>
+              </a:lnSpc>
+              <a:spcAft>
+                <a:spcPts val="800"/>
+              </a:spcAft>
+            </a:pPr>
+            <a:r>
+              <a:rPr sz="1800" b="0" i="0">
+                <a:solidFill>
+                  <a:srgbClr val="7C9CFF"/>
+                </a:solidFill>
+                <a:latin typeface="Helvetica Neue"/>
+              </a:rPr>
+              <a:t>●  </a:t>
+            </a:r>
+            <a:r>
+              <a:rPr sz="1800" b="1" i="0">
+                <a:solidFill>
+                  <a:srgbClr val="EAECF4"/>
+                </a:solidFill>
+                <a:latin typeface="Helvetica Neue"/>
+              </a:rPr>
+              <a:t>Is a small, careful result publishable</a:t>
+            </a:r>
+            <a:r>
+              <a:rPr sz="1800" b="0" i="0">
+                <a:solidFill>
+                  <a:srgbClr val="EAECF4"/>
+                </a:solidFill>
+                <a:latin typeface="Helvetica Neue"/>
+              </a:rPr>
+              <a:t>, or does this need the scale work it currently refuses to do?</a:t>
+            </a:r>
+          </a:p>
+          <a:p>
+            <a:pPr lvl="1">
+              <a:lnSpc>
+                <a:spcPct val="108000"/>
+              </a:lnSpc>
+              <a:spcAft>
+                <a:spcPts val="500"/>
+              </a:spcAft>
+            </a:pPr>
+            <a:r>
+              <a:rPr sz="1600" b="0" i="0">
+                <a:solidFill>
+                  <a:srgbClr val="8A93A8"/>
+                </a:solidFill>
+                <a:latin typeface="Helvetica Neue"/>
+              </a:rPr>
+              <a:t>    –  </a:t>
+            </a:r>
+            <a:r>
+              <a:rPr sz="1600" b="0" i="0">
+                <a:solidFill>
+                  <a:srgbClr val="8A93A8"/>
+                </a:solidFill>
+                <a:latin typeface="Helvetica Neue"/>
+              </a:rPr>
+              <a:t>Nine open questions are written up with what each would settle and what it costs. Which is worth a month is the judgement I would most like contradicted.</a:t>
+            </a:r>
+          </a:p>
+        </p:txBody>
+      </p:sp>
+    </p:spTree>
+  </p:cSld>
+  <p:clrMapOvr>
+    <a:masterClrMapping/>
+  </p:clrMapOvr>
+</p:sld>
+</file>
+
 <file path=ppt/slides/slide2.xml><?xml version="1.0" encoding="utf-8"?>
 <p:sld xmlns:a="http://schemas.openxmlformats.org/drawingml/2006/main" xmlns:p="http://schemas.openxmlformats.org/presentationml/2006/main" xmlns:r="http://schemas.openxmlformats.org/officeDocument/2006/relationships">
   <p:cSld>
@@ -4657,7 +6099,7 @@
                 </a:solidFill>
                 <a:latin typeface="Helvetica Neue"/>
               </a:rPr>
-              <a:t>02 / 09</a:t>
+              <a:t>02 / 11</a:t>
             </a:r>
           </a:p>
         </p:txBody>
@@ -4715,7 +6157,7 @@
         <p:spPr>
           <a:xfrm>
             <a:off x="0" y="6812000"/>
-            <a:ext cx="2709333" cy="46000"/>
+            <a:ext cx="2216727" cy="46000"/>
           </a:xfrm>
           <a:prstGeom prst="rect">
             <a:avLst/>
@@ -5292,7 +6734,7 @@
                 </a:solidFill>
                 <a:latin typeface="Helvetica Neue"/>
               </a:rPr>
-              <a:t>03 / 09</a:t>
+              <a:t>03 / 11</a:t>
             </a:r>
           </a:p>
         </p:txBody>
@@ -5350,7 +6792,7 @@
         <p:spPr>
           <a:xfrm>
             <a:off x="0" y="6812000"/>
-            <a:ext cx="4064000" cy="46000"/>
+            <a:ext cx="3325090" cy="46000"/>
           </a:xfrm>
           <a:prstGeom prst="rect">
             <a:avLst/>
@@ -6018,7 +7460,7 @@
                 </a:solidFill>
                 <a:latin typeface="Helvetica Neue"/>
               </a:rPr>
-              <a:t>04 / 09</a:t>
+              <a:t>04 / 11</a:t>
             </a:r>
           </a:p>
         </p:txBody>
@@ -6076,7 +7518,7 @@
         <p:spPr>
           <a:xfrm>
             <a:off x="0" y="6812000"/>
-            <a:ext cx="5418666" cy="46000"/>
+            <a:ext cx="4433454" cy="46000"/>
           </a:xfrm>
           <a:prstGeom prst="rect">
             <a:avLst/>
@@ -6708,7 +8150,7 @@
                 </a:solidFill>
                 <a:latin typeface="Helvetica Neue"/>
               </a:rPr>
-              <a:t>05 / 09</a:t>
+              <a:t>05 / 11</a:t>
             </a:r>
           </a:p>
         </p:txBody>
@@ -6766,7 +8208,7 @@
         <p:spPr>
           <a:xfrm>
             <a:off x="0" y="6812000"/>
-            <a:ext cx="6773333" cy="46000"/>
+            <a:ext cx="5541818" cy="46000"/>
           </a:xfrm>
           <a:prstGeom prst="rect">
             <a:avLst/>
@@ -7362,7 +8804,7 @@
                 </a:solidFill>
                 <a:latin typeface="Helvetica Neue"/>
               </a:rPr>
-              <a:t>06 / 09</a:t>
+              <a:t>06 / 11</a:t>
             </a:r>
           </a:p>
         </p:txBody>
@@ -7420,7 +8862,7 @@
         <p:spPr>
           <a:xfrm>
             <a:off x="0" y="6812000"/>
-            <a:ext cx="8128000" cy="46000"/>
+            <a:ext cx="6650181" cy="46000"/>
           </a:xfrm>
           <a:prstGeom prst="rect">
             <a:avLst/>
@@ -7997,7 +9439,7 @@
                 </a:solidFill>
                 <a:latin typeface="Helvetica Neue"/>
               </a:rPr>
-              <a:t>07 / 09</a:t>
+              <a:t>07 / 11</a:t>
             </a:r>
           </a:p>
         </p:txBody>
@@ -8055,7 +9497,7 @@
         <p:spPr>
           <a:xfrm>
             <a:off x="0" y="6812000"/>
-            <a:ext cx="9482666" cy="46000"/>
+            <a:ext cx="7758545" cy="46000"/>
           </a:xfrm>
           <a:prstGeom prst="rect">
             <a:avLst/>
@@ -8632,7 +10074,7 @@
                 </a:solidFill>
                 <a:latin typeface="Helvetica Neue"/>
               </a:rPr>
-              <a:t>08 / 09</a:t>
+              <a:t>08 / 11</a:t>
             </a:r>
           </a:p>
         </p:txBody>
@@ -8690,7 +10132,7 @@
         <p:spPr>
           <a:xfrm>
             <a:off x="0" y="6812000"/>
-            <a:ext cx="10837333" cy="46000"/>
+            <a:ext cx="8866909" cy="46000"/>
           </a:xfrm>
           <a:prstGeom prst="rect">
             <a:avLst/>
@@ -8966,7 +10408,7 @@
         <p:spPr>
           <a:xfrm>
             <a:off x="760000" y="430000"/>
-            <a:ext cx="1702000" cy="340000"/>
+            <a:ext cx="1794000" cy="340000"/>
           </a:xfrm>
           <a:prstGeom prst="roundRect">
             <a:avLst/>
@@ -9005,7 +10447,7 @@
                 </a:solidFill>
                 <a:latin typeface="Helvetica Neue"/>
               </a:rPr>
-              <a:t>§4 · WHAT I WANT</a:t>
+              <a:t>§3 · THE BOUNDARY</a:t>
             </a:r>
           </a:p>
         </p:txBody>
@@ -9092,7 +10534,7 @@
                 </a:solidFill>
                 <a:latin typeface="Helvetica Neue"/>
               </a:rPr>
-              <a:t>Three things I cannot decide from inside</a:t>
+              <a:t>What the failures rule out — and what is left standing</a:t>
             </a:r>
           </a:p>
         </p:txBody>
@@ -9249,7 +10691,7 @@
                 </a:solidFill>
                 <a:latin typeface="Helvetica Neue"/>
               </a:rPr>
-              <a:t>09 / 09</a:t>
+              <a:t>09 / 11</a:t>
             </a:r>
           </a:p>
         </p:txBody>
@@ -9307,7 +10749,7 @@
         <p:spPr>
           <a:xfrm>
             <a:off x="0" y="6812000"/>
-            <a:ext cx="12192000" cy="46000"/>
+            <a:ext cx="9975272" cy="46000"/>
           </a:xfrm>
           <a:prstGeom prst="rect">
             <a:avLst/>
@@ -9382,13 +10824,22 @@
               <a:t>●  </a:t>
             </a:r>
             <a:r>
+              <a:rPr sz="1800" b="0" i="0">
+                <a:solidFill>
+                  <a:srgbClr val="EAECF4"/>
+                </a:solidFill>
+                <a:latin typeface="Helvetica Neue"/>
+              </a:rPr>
+              <a:t>Most of this is things that did not work. That counts for something only if we separate </a:t>
+            </a:r>
+            <a:r>
               <a:rPr sz="1800" b="1" i="0">
                 <a:solidFill>
                   <a:srgbClr val="EAECF4"/>
                 </a:solidFill>
                 <a:latin typeface="Helvetica Neue"/>
               </a:rPr>
-              <a:t>Is the main result already known?</a:t>
+              <a:t>what is ruled out</a:t>
             </a:r>
             <a:r>
               <a:rPr sz="1800" b="0" i="0">
@@ -9397,7 +10848,25 @@
                 </a:solidFill>
                 <a:latin typeface="Helvetica Neue"/>
               </a:rPr>
-              <a:t> It is a line of arithmetic. Practitioners may simply assume it, and 'we could not find it stated' is the weakest form of a novelty claim.</a:t>
+              <a:t> from </a:t>
+            </a:r>
+            <a:r>
+              <a:rPr sz="1800" b="1" i="0">
+                <a:solidFill>
+                  <a:srgbClr val="EAECF4"/>
+                </a:solidFill>
+                <a:latin typeface="Helvetica Neue"/>
+              </a:rPr>
+              <a:t>what we simply got wrong</a:t>
+            </a:r>
+            <a:r>
+              <a:rPr sz="1800" b="0" i="0">
+                <a:solidFill>
+                  <a:srgbClr val="EAECF4"/>
+                </a:solidFill>
+                <a:latin typeface="Helvetica Neue"/>
+              </a:rPr>
+              <a:t>.</a:t>
             </a:r>
           </a:p>
           <a:p>
@@ -9421,20 +10890,20 @@
             <a:r>
               <a:rPr sz="1800" b="1" i="0">
                 <a:solidFill>
+                  <a:srgbClr val="6FD39A"/>
+                </a:solidFill>
+                <a:latin typeface="Helvetica Neue"/>
+              </a:rPr>
+              <a:t>Ruled out, for anyone</a:t>
+            </a:r>
+            <a:r>
+              <a:rPr sz="1800" b="0" i="0">
+                <a:solidFill>
                   <a:srgbClr val="EAECF4"/>
                 </a:solidFill>
                 <a:latin typeface="Helvetica Neue"/>
               </a:rPr>
-              <a:t>Is the benchmark consequence worth a week?</a:t>
-            </a:r>
-            <a:r>
-              <a:rPr sz="1800" b="0" i="0">
-                <a:solidFill>
-                  <a:srgbClr val="EAECF4"/>
-                </a:solidFill>
-                <a:latin typeface="Helvetica Neue"/>
-              </a:rPr>
-              <a:t> Re-scoring one published test with the names moved is the only thing here that changes what others do.</a:t>
+              <a:t> — you cannot tell how much damage an edit does from how much of it arrives; an edit does not blur everything about a person equally; the standard 'did it work' score is not hiding anything.</a:t>
             </a:r>
           </a:p>
           <a:p>
@@ -9458,20 +10927,20 @@
             <a:r>
               <a:rPr sz="1800" b="1" i="0">
                 <a:solidFill>
+                  <a:srgbClr val="F58AA0"/>
+                </a:solidFill>
+                <a:latin typeface="Helvetica Neue"/>
+              </a:rPr>
+              <a:t>Just our mistakes</a:t>
+            </a:r>
+            <a:r>
+              <a:rPr sz="1800" b="0" i="0">
+                <a:solidFill>
                   <a:srgbClr val="EAECF4"/>
                 </a:solidFill>
                 <a:latin typeface="Helvetica Neue"/>
               </a:rPr>
-              <a:t>Is a small, careful result publishable</a:t>
-            </a:r>
-            <a:r>
-              <a:rPr sz="1800" b="0" i="0">
-                <a:solidFill>
-                  <a:srgbClr val="EAECF4"/>
-                </a:solidFill>
-                <a:latin typeface="Helvetica Neue"/>
-              </a:rPr>
-              <a:t>, or does this need the scale work it currently refuses to do?</a:t>
+              <a:t> — a safety check on the wrong quantity, a test that could not detect its own target, a file that reported half a run as whole. In the record because they are why the rest can be trusted. Not findings.</a:t>
             </a:r>
           </a:p>
           <a:p>
@@ -9499,7 +10968,7 @@
                 </a:solidFill>
                 <a:latin typeface="Helvetica Neue"/>
               </a:rPr>
-              <a:t>Nine open questions are written up with what each would settle and what it costs. Which is worth a month is the judgement I would most like contradicted.</a:t>
+              <a:t>Put the eliminations together and a boundary falls out — the clearest thing this project knows.</a:t>
             </a:r>
           </a:p>
         </p:txBody>

--- a/ai/edit-slice/presentation/DECK.pptx
+++ b/ai/edit-slice/presentation/DECK.pptx
@@ -9917,7 +9917,7 @@
                 </a:solidFill>
                 <a:latin typeface="Helvetica Neue"/>
               </a:rPr>
-              <a:t>Eleven claims. Eight withdrawn or narrowed.</a:t>
+              <a:t>Twelve claims. Nine withdrawn or narrowed.</a:t>
             </a:r>
           </a:p>
         </p:txBody>

--- a/ai/edit-slice/presentation/DECK.pptx
+++ b/ai/edit-slice/presentation/DECK.pptx
@@ -16,6 +16,7 @@
     <p:sldId id="264" r:id="rId16"/>
     <p:sldId id="265" r:id="rId17"/>
     <p:sldId id="266" r:id="rId18"/>
+    <p:sldId id="267" r:id="rId19"/>
   </p:sldIdLst>
   <p:sldSz cx="12192000" cy="6858000" type="screen4x3"/>
   <p:notesSz cx="6858000" cy="9144000"/>
@@ -582,7 +583,7 @@
           <a:lstStyle/>
           <a:p>
             <a:r>
-              <a:t>T-086. If there is one thing to take away, it is this slide. The last bullet is the sharpest fact in the project and the easiest to rush.</a:t>
+              <a:t>This slide is the argument for the negative results. Do NOT let the two lists blur: a record that mixes elimination with self-inflicted cost earns credit for neither. §5.1 of the paper.</a:t>
             </a:r>
           </a:p>
         </p:txBody>
@@ -652,6 +653,76 @@
           <a:lstStyle/>
           <a:p>
             <a:r>
+              <a:t>T-086. If there is one thing to take away, it is this slide. The last bullet is the sharpest fact in the project and the easiest to rush.</a:t>
+            </a:r>
+          </a:p>
+        </p:txBody>
+      </p:sp>
+      <p:sp>
+        <p:nvSpPr>
+          <p:cNvPr id="4" name="Slide Number Placeholder 3"/>
+          <p:cNvSpPr>
+            <a:spLocks noGrp="1"/>
+          </p:cNvSpPr>
+          <p:nvPr>
+            <p:ph type="sldNum" idx="5" sz="quarter"/>
+          </p:nvPr>
+        </p:nvSpPr>
+        <p:spPr/>
+      </p:sp>
+    </p:spTree>
+  </p:cSld>
+  <p:clrMapOvr>
+    <a:masterClrMapping/>
+  </p:clrMapOvr>
+</p:notes>
+</file>
+
+<file path=ppt/notesSlides/notesSlide12.xml><?xml version="1.0" encoding="utf-8"?>
+<p:notes xmlns:a="http://schemas.openxmlformats.org/drawingml/2006/main" xmlns:p="http://schemas.openxmlformats.org/presentationml/2006/main" xmlns:r="http://schemas.openxmlformats.org/officeDocument/2006/relationships">
+  <p:cSld>
+    <p:spTree>
+      <p:nvGrpSpPr>
+        <p:cNvPr id="1" name=""/>
+        <p:cNvGrpSpPr/>
+        <p:nvPr/>
+      </p:nvGrpSpPr>
+      <p:grpSpPr>
+        <a:xfrm>
+          <a:off x="0" y="0"/>
+          <a:ext cx="0" cy="0"/>
+          <a:chOff x="0" y="0"/>
+          <a:chExt cx="0" cy="0"/>
+        </a:xfrm>
+      </p:grpSpPr>
+      <p:sp>
+        <p:nvSpPr>
+          <p:cNvPr id="2" name="Slide Image Placeholder 1"/>
+          <p:cNvSpPr>
+            <a:spLocks noGrp="1"/>
+          </p:cNvSpPr>
+          <p:nvPr>
+            <p:ph type="sldImg" idx="2"/>
+          </p:nvPr>
+        </p:nvSpPr>
+        <p:spPr/>
+      </p:sp>
+      <p:sp>
+        <p:nvSpPr>
+          <p:cNvPr id="3" name="Notes Placeholder 2"/>
+          <p:cNvSpPr>
+            <a:spLocks noGrp="1"/>
+          </p:cNvSpPr>
+          <p:nvPr>
+            <p:ph type="body" idx="3" sz="quarter"/>
+          </p:nvPr>
+        </p:nvSpPr>
+        <p:spPr/>
+        <p:txBody>
+          <a:bodyPr/>
+          <a:lstStyle/>
+          <a:p>
+            <a:r>
               <a:t>§7 and §8 of the paper. Ask directly; do not hedge. Silence is also feedback.</a:t>
             </a:r>
           </a:p>
@@ -932,7 +1003,7 @@
           <a:lstStyle/>
           <a:p>
             <a:r>
-              <a:t>This is the consequence in §7 of the paper, priced at about a week: re-score one published ripple benchmark with the subject moved later in the sentence. The honest position is that we have not run it.</a:t>
+              <a:t>Chain 254, verbatim, from E-023 (generation) and E-033 (both arms). Use this slide whenever the abstraction loses the room — it is the whole paper in one person. The generations are real model output, not paraphrase.</a:t>
             </a:r>
           </a:p>
         </p:txBody>
@@ -1002,7 +1073,7 @@
           <a:lstStyle/>
           <a:p>
             <a:r>
-              <a:t>E-026's RCA. The gate matched arms on 'lift on the target', which a logit nudge also achieves. E-028a then measured it: lift spans 0.17 nats across two layers and a 4x budget while real strength spans 5.70. Say plainly that this was our error before it was anyone else's.</a:t>
+              <a:t>This is the consequence in §7 of the paper, priced at about a week: re-score one published ripple benchmark with the subject moved later in the sentence. The honest position is that we have not run it.</a:t>
             </a:r>
           </a:p>
         </p:txBody>
@@ -1072,7 +1143,7 @@
           <a:lstStyle/>
           <a:p>
             <a:r>
-              <a:t>T-079 answered DENY. E-028b matched the arms (16x step budget), E-028c found 63% difference at identical delivery, E-028d broke the layer/budget collinearity. 1.22 vs 0.41 nats of reach per nat displaced.</a:t>
+              <a:t>E-026's RCA. The gate matched arms on 'lift on the target', which a logit nudge also achieves. E-028a then measured it: lift spans 0.17 nats across two layers and a 4x budget while real strength spans 5.70. Say plainly that this was our error before it was anyone else's.</a:t>
             </a:r>
           </a:p>
         </p:txBody>
@@ -1142,7 +1213,7 @@
           <a:lstStyle/>
           <a:p>
             <a:r>
-              <a:t>Table 5 of the paper. This is the most credible slide in the deck and the easiest to rush — do not.</a:t>
+              <a:t>T-079 answered DENY. E-028b matched the arms (16x step budget), E-028c found 63% difference at identical delivery, E-028d broke the layer/budget collinearity. 1.22 vs 0.41 nats of reach per nat displaced.</a:t>
             </a:r>
           </a:p>
         </p:txBody>
@@ -1212,7 +1283,7 @@
           <a:lstStyle/>
           <a:p>
             <a:r>
-              <a:t>This slide is the argument for the negative results. Do NOT let the two lists blur: a record that mixes elimination with self-inflicted cost earns credit for neither. §5.1 of the paper.</a:t>
+              <a:t>Table 5 of the paper. This is the most credible slide in the deck and the easiest to rush — do not.</a:t>
             </a:r>
           </a:p>
         </p:txBody>
@@ -4642,7 +4713,7 @@
                 </a:solidFill>
                 <a:latin typeface="Helvetica Neue"/>
               </a:rPr>
-              <a:t>We can say WHICH facts an edit touches. Not how hard.</a:t>
+              <a:t>What the failures rule out — and what is left standing</a:t>
             </a:r>
           </a:p>
         </p:txBody>
@@ -4799,7 +4870,7 @@
                 </a:solidFill>
                 <a:latin typeface="Helvetica Neue"/>
               </a:rPr>
-              <a:t>10 / 11</a:t>
+              <a:t>10 / 12</a:t>
             </a:r>
           </a:p>
         </p:txBody>
@@ -4857,7 +4928,7 @@
         <p:spPr>
           <a:xfrm>
             <a:off x="0" y="6812000"/>
-            <a:ext cx="11083636" cy="46000"/>
+            <a:ext cx="10160000" cy="46000"/>
           </a:xfrm>
           <a:prstGeom prst="rect">
             <a:avLst/>
@@ -4895,45 +4966,6 @@
       <p:sp>
         <p:nvSpPr>
           <p:cNvPr id="12" name="TextBox 11"/>
-          <p:cNvSpPr txBox="1"/>
-          <p:nvPr/>
-        </p:nvSpPr>
-        <p:spPr>
-          <a:xfrm>
-            <a:off x="760000" y="2650000"/>
-            <a:ext cx="10672000" cy="2000000"/>
-          </a:xfrm>
-          <a:prstGeom prst="rect">
-            <a:avLst/>
-          </a:prstGeom>
-          <a:noFill/>
-        </p:spPr>
-        <p:txBody>
-          <a:bodyPr wrap="square">
-            <a:spAutoFit/>
-          </a:bodyPr>
-          <a:lstStyle/>
-          <a:p>
-            <a:pPr algn="ctr">
-              <a:lnSpc>
-                <a:spcPct val="120000"/>
-              </a:lnSpc>
-            </a:pPr>
-            <a:r>
-              <a:rPr sz="2400" b="0" i="0">
-                <a:solidFill>
-                  <a:srgbClr val="EAECF4"/>
-                </a:solidFill>
-                <a:latin typeface="Helvetica Neue"/>
-              </a:rPr>
-              <a:t>which — yes.   how hard — no.</a:t>
-            </a:r>
-          </a:p>
-        </p:txBody>
-      </p:sp>
-      <p:sp>
-        <p:nvSpPr>
-          <p:cNvPr id="13" name="TextBox 12"/>
           <p:cNvSpPr txBox="1"/>
           <p:nvPr/>
         </p:nvSpPr>
@@ -4971,13 +5003,22 @@
               <a:t>●  </a:t>
             </a:r>
             <a:r>
+              <a:rPr sz="1800" b="0" i="0">
+                <a:solidFill>
+                  <a:srgbClr val="EAECF4"/>
+                </a:solidFill>
+                <a:latin typeface="Helvetica Neue"/>
+              </a:rPr>
+              <a:t>Most of this is things that did not work. That counts for something only if we separate </a:t>
+            </a:r>
+            <a:r>
               <a:rPr sz="1800" b="1" i="0">
                 <a:solidFill>
-                  <a:srgbClr val="6FD39A"/>
-                </a:solidFill>
-                <a:latin typeface="Helvetica Neue"/>
-              </a:rPr>
-              <a:t>WHICH is settled</a:t>
+                  <a:srgbClr val="EAECF4"/>
+                </a:solidFill>
+                <a:latin typeface="Helvetica Neue"/>
+              </a:rPr>
+              <a:t>what is ruled out</a:t>
             </a:r>
             <a:r>
               <a:rPr sz="1800" b="0" i="0">
@@ -4986,7 +5027,7 @@
                 </a:solidFill>
                 <a:latin typeface="Helvetica Neue"/>
               </a:rPr>
-              <a:t> — cheaply, exactly, at every size from 6B to 405B. And the probe hit hardest is the one whose answer is the same </a:t>
+              <a:t> from </a:t>
             </a:r>
             <a:r>
               <a:rPr sz="1800" b="1" i="0">
@@ -4995,7 +5036,7 @@
                 </a:solidFill>
                 <a:latin typeface="Helvetica Neue"/>
               </a:rPr>
-              <a:t>kind of thing</a:t>
+              <a:t>what we simply got wrong</a:t>
             </a:r>
             <a:r>
               <a:rPr sz="1800" b="0" i="0">
@@ -5004,7 +5045,7 @@
                 </a:solidFill>
                 <a:latin typeface="Helvetica Neue"/>
               </a:rPr>
-              <a:t> as what was injected. Six cases out of six.</a:t>
+              <a:t>.</a:t>
             </a:r>
           </a:p>
           <a:p>
@@ -5028,11 +5069,48 @@
             <a:r>
               <a:rPr sz="1800" b="1" i="0">
                 <a:solidFill>
+                  <a:srgbClr val="6FD39A"/>
+                </a:solidFill>
+                <a:latin typeface="Helvetica Neue"/>
+              </a:rPr>
+              <a:t>Ruled out, for anyone</a:t>
+            </a:r>
+            <a:r>
+              <a:rPr sz="1800" b="0" i="0">
+                <a:solidFill>
+                  <a:srgbClr val="EAECF4"/>
+                </a:solidFill>
+                <a:latin typeface="Helvetica Neue"/>
+              </a:rPr>
+              <a:t> — you cannot tell how much damage an edit does from how much of it arrives; an edit does not blur everything about a person equally; the standard 'did it work' score is not hiding anything.</a:t>
+            </a:r>
+          </a:p>
+          <a:p>
+            <a:pPr>
+              <a:lnSpc>
+                <a:spcPct val="108000"/>
+              </a:lnSpc>
+              <a:spcAft>
+                <a:spcPts val="800"/>
+              </a:spcAft>
+            </a:pPr>
+            <a:r>
+              <a:rPr sz="1800" b="0" i="0">
+                <a:solidFill>
+                  <a:srgbClr val="7C9CFF"/>
+                </a:solidFill>
+                <a:latin typeface="Helvetica Neue"/>
+              </a:rPr>
+              <a:t>●  </a:t>
+            </a:r>
+            <a:r>
+              <a:rPr sz="1800" b="1" i="0">
+                <a:solidFill>
                   <a:srgbClr val="F58AA0"/>
                 </a:solidFill>
                 <a:latin typeface="Helvetica Neue"/>
               </a:rPr>
-              <a:t>HOW HARD is open</a:t>
+              <a:t>Just our mistakes</a:t>
             </a:r>
             <a:r>
               <a:rPr sz="1800" b="0" i="0">
@@ -5041,7 +5119,7 @@
                 </a:solidFill>
                 <a:latin typeface="Helvetica Neue"/>
               </a:rPr>
-              <a:t> — nothing we have predicts it. The two best candidates explain about a fifth of the variation each.</a:t>
+              <a:t> — a safety check on the wrong quantity, a test that could not detect its own target, a file that reported half a run as whole. In the record because they are why the rest can be trusted. Not findings.</a:t>
             </a:r>
           </a:p>
           <a:p>
@@ -5069,53 +5147,7 @@
                 </a:solidFill>
                 <a:latin typeface="Helvetica Neue"/>
               </a:rPr>
-              <a:t>And the measurement this whole project is built on cannot help: it has </a:t>
-            </a:r>
-            <a:r>
-              <a:rPr sz="1600" b="1" i="0">
-                <a:solidFill>
-                  <a:srgbClr val="EAECF4"/>
-                </a:solidFill>
-                <a:latin typeface="Helvetica Neue"/>
-              </a:rPr>
-              <a:t>exactly the same value</a:t>
-            </a:r>
-            <a:r>
-              <a:rPr sz="1600" b="0" i="0">
-                <a:solidFill>
-                  <a:srgbClr val="8A93A8"/>
-                </a:solidFill>
-                <a:latin typeface="Helvetica Neue"/>
-              </a:rPr>
-              <a:t> for every probe whose outcome differs. Zero variance where the answer varies most.</a:t>
-            </a:r>
-          </a:p>
-          <a:p>
-            <a:pPr>
-              <a:lnSpc>
-                <a:spcPct val="108000"/>
-              </a:lnSpc>
-              <a:spcAft>
-                <a:spcPts val="800"/>
-              </a:spcAft>
-            </a:pPr>
-            <a:r>
-              <a:rPr sz="1800" b="0" i="0">
-                <a:solidFill>
-                  <a:srgbClr val="7C9CFF"/>
-                </a:solidFill>
-                <a:latin typeface="Helvetica Neue"/>
-              </a:rPr>
-              <a:t>●  </a:t>
-            </a:r>
-            <a:r>
-              <a:rPr sz="1800" b="0" i="0">
-                <a:solidFill>
-                  <a:srgbClr val="EAECF4"/>
-                </a:solidFill>
-                <a:latin typeface="Helvetica Neue"/>
-              </a:rPr>
-              <a:t>That is a real boundary, it came entirely from things not working, and the question past it is the one I would most like help with.</a:t>
+              <a:t>Put the eliminations together and a boundary falls out — the clearest thing this project knows.</a:t>
             </a:r>
           </a:p>
         </p:txBody>
@@ -5199,7 +5231,7 @@
         <p:spPr>
           <a:xfrm>
             <a:off x="760000" y="430000"/>
-            <a:ext cx="1702000" cy="340000"/>
+            <a:ext cx="1794000" cy="340000"/>
           </a:xfrm>
           <a:prstGeom prst="roundRect">
             <a:avLst/>
@@ -5238,7 +5270,7 @@
                 </a:solidFill>
                 <a:latin typeface="Helvetica Neue"/>
               </a:rPr>
-              <a:t>§4 · WHAT I WANT</a:t>
+              <a:t>§3 · THE BOUNDARY</a:t>
             </a:r>
           </a:p>
         </p:txBody>
@@ -5325,7 +5357,7 @@
                 </a:solidFill>
                 <a:latin typeface="Helvetica Neue"/>
               </a:rPr>
-              <a:t>Three things I cannot decide from inside</a:t>
+              <a:t>We can say WHICH facts an edit touches. Not how hard.</a:t>
             </a:r>
           </a:p>
         </p:txBody>
@@ -5482,7 +5514,690 @@
                 </a:solidFill>
                 <a:latin typeface="Helvetica Neue"/>
               </a:rPr>
-              <a:t>11 / 11</a:t>
+              <a:t>11 / 12</a:t>
+            </a:r>
+          </a:p>
+        </p:txBody>
+      </p:sp>
+      <p:sp>
+        <p:nvSpPr>
+          <p:cNvPr id="10" name="Rectangle 9"/>
+          <p:cNvSpPr/>
+          <p:nvPr/>
+        </p:nvSpPr>
+        <p:spPr>
+          <a:xfrm>
+            <a:off x="0" y="6812000"/>
+            <a:ext cx="12192000" cy="46000"/>
+          </a:xfrm>
+          <a:prstGeom prst="rect">
+            <a:avLst/>
+          </a:prstGeom>
+          <a:solidFill>
+            <a:srgbClr val="1E2540"/>
+          </a:solidFill>
+          <a:ln>
+            <a:noFill/>
+          </a:ln>
+          <a:effectLst/>
+        </p:spPr>
+        <p:style>
+          <a:lnRef idx="1">
+            <a:schemeClr val="accent1"/>
+          </a:lnRef>
+          <a:fillRef idx="3">
+            <a:schemeClr val="accent1"/>
+          </a:fillRef>
+          <a:effectRef idx="2">
+            <a:schemeClr val="accent1"/>
+          </a:effectRef>
+          <a:fontRef idx="minor">
+            <a:schemeClr val="lt1"/>
+          </a:fontRef>
+        </p:style>
+        <p:txBody>
+          <a:bodyPr rtlCol="0" anchor="ctr"/>
+          <a:lstStyle/>
+          <a:p>
+            <a:pPr algn="ctr"/>
+          </a:p>
+        </p:txBody>
+      </p:sp>
+      <p:sp>
+        <p:nvSpPr>
+          <p:cNvPr id="11" name="Rectangle 10"/>
+          <p:cNvSpPr/>
+          <p:nvPr/>
+        </p:nvSpPr>
+        <p:spPr>
+          <a:xfrm>
+            <a:off x="0" y="6812000"/>
+            <a:ext cx="11176000" cy="46000"/>
+          </a:xfrm>
+          <a:prstGeom prst="rect">
+            <a:avLst/>
+          </a:prstGeom>
+          <a:solidFill>
+            <a:srgbClr val="7C9CFF"/>
+          </a:solidFill>
+          <a:ln>
+            <a:noFill/>
+          </a:ln>
+          <a:effectLst/>
+        </p:spPr>
+        <p:style>
+          <a:lnRef idx="1">
+            <a:schemeClr val="accent1"/>
+          </a:lnRef>
+          <a:fillRef idx="3">
+            <a:schemeClr val="accent1"/>
+          </a:fillRef>
+          <a:effectRef idx="2">
+            <a:schemeClr val="accent1"/>
+          </a:effectRef>
+          <a:fontRef idx="minor">
+            <a:schemeClr val="lt1"/>
+          </a:fontRef>
+        </p:style>
+        <p:txBody>
+          <a:bodyPr rtlCol="0" anchor="ctr"/>
+          <a:lstStyle/>
+          <a:p>
+            <a:pPr algn="ctr"/>
+          </a:p>
+        </p:txBody>
+      </p:sp>
+      <p:sp>
+        <p:nvSpPr>
+          <p:cNvPr id="12" name="TextBox 11"/>
+          <p:cNvSpPr txBox="1"/>
+          <p:nvPr/>
+        </p:nvSpPr>
+        <p:spPr>
+          <a:xfrm>
+            <a:off x="760000" y="2650000"/>
+            <a:ext cx="10672000" cy="2000000"/>
+          </a:xfrm>
+          <a:prstGeom prst="rect">
+            <a:avLst/>
+          </a:prstGeom>
+          <a:noFill/>
+        </p:spPr>
+        <p:txBody>
+          <a:bodyPr wrap="square">
+            <a:spAutoFit/>
+          </a:bodyPr>
+          <a:lstStyle/>
+          <a:p>
+            <a:pPr algn="ctr">
+              <a:lnSpc>
+                <a:spcPct val="120000"/>
+              </a:lnSpc>
+            </a:pPr>
+            <a:r>
+              <a:rPr sz="2400" b="0" i="0">
+                <a:solidFill>
+                  <a:srgbClr val="EAECF4"/>
+                </a:solidFill>
+                <a:latin typeface="Helvetica Neue"/>
+              </a:rPr>
+              <a:t>which — yes.   how hard — no.</a:t>
+            </a:r>
+          </a:p>
+        </p:txBody>
+      </p:sp>
+      <p:sp>
+        <p:nvSpPr>
+          <p:cNvPr id="13" name="TextBox 12"/>
+          <p:cNvSpPr txBox="1"/>
+          <p:nvPr/>
+        </p:nvSpPr>
+        <p:spPr>
+          <a:xfrm>
+            <a:off x="760000" y="1900000"/>
+            <a:ext cx="10672000" cy="4398000"/>
+          </a:xfrm>
+          <a:prstGeom prst="rect">
+            <a:avLst/>
+          </a:prstGeom>
+          <a:noFill/>
+        </p:spPr>
+        <p:txBody>
+          <a:bodyPr wrap="square">
+            <a:spAutoFit/>
+          </a:bodyPr>
+          <a:lstStyle/>
+          <a:p>
+            <a:pPr>
+              <a:lnSpc>
+                <a:spcPct val="108000"/>
+              </a:lnSpc>
+              <a:spcAft>
+                <a:spcPts val="800"/>
+              </a:spcAft>
+            </a:pPr>
+            <a:r>
+              <a:rPr sz="1800" b="0" i="0">
+                <a:solidFill>
+                  <a:srgbClr val="7C9CFF"/>
+                </a:solidFill>
+                <a:latin typeface="Helvetica Neue"/>
+              </a:rPr>
+              <a:t>●  </a:t>
+            </a:r>
+            <a:r>
+              <a:rPr sz="1800" b="1" i="0">
+                <a:solidFill>
+                  <a:srgbClr val="6FD39A"/>
+                </a:solidFill>
+                <a:latin typeface="Helvetica Neue"/>
+              </a:rPr>
+              <a:t>WHICH is settled</a:t>
+            </a:r>
+            <a:r>
+              <a:rPr sz="1800" b="0" i="0">
+                <a:solidFill>
+                  <a:srgbClr val="EAECF4"/>
+                </a:solidFill>
+                <a:latin typeface="Helvetica Neue"/>
+              </a:rPr>
+              <a:t> — cheaply, exactly, at every size from 6B to 405B. And the probe hit hardest is the one whose answer is the same </a:t>
+            </a:r>
+            <a:r>
+              <a:rPr sz="1800" b="1" i="0">
+                <a:solidFill>
+                  <a:srgbClr val="EAECF4"/>
+                </a:solidFill>
+                <a:latin typeface="Helvetica Neue"/>
+              </a:rPr>
+              <a:t>kind of thing</a:t>
+            </a:r>
+            <a:r>
+              <a:rPr sz="1800" b="0" i="0">
+                <a:solidFill>
+                  <a:srgbClr val="EAECF4"/>
+                </a:solidFill>
+                <a:latin typeface="Helvetica Neue"/>
+              </a:rPr>
+              <a:t> as what was injected. Six cases out of six.</a:t>
+            </a:r>
+          </a:p>
+          <a:p>
+            <a:pPr>
+              <a:lnSpc>
+                <a:spcPct val="108000"/>
+              </a:lnSpc>
+              <a:spcAft>
+                <a:spcPts val="800"/>
+              </a:spcAft>
+            </a:pPr>
+            <a:r>
+              <a:rPr sz="1800" b="0" i="0">
+                <a:solidFill>
+                  <a:srgbClr val="7C9CFF"/>
+                </a:solidFill>
+                <a:latin typeface="Helvetica Neue"/>
+              </a:rPr>
+              <a:t>●  </a:t>
+            </a:r>
+            <a:r>
+              <a:rPr sz="1800" b="1" i="0">
+                <a:solidFill>
+                  <a:srgbClr val="F58AA0"/>
+                </a:solidFill>
+                <a:latin typeface="Helvetica Neue"/>
+              </a:rPr>
+              <a:t>HOW HARD is open</a:t>
+            </a:r>
+            <a:r>
+              <a:rPr sz="1800" b="0" i="0">
+                <a:solidFill>
+                  <a:srgbClr val="EAECF4"/>
+                </a:solidFill>
+                <a:latin typeface="Helvetica Neue"/>
+              </a:rPr>
+              <a:t> — nothing we have predicts it. The two best candidates explain about a fifth of the variation each.</a:t>
+            </a:r>
+          </a:p>
+          <a:p>
+            <a:pPr lvl="1">
+              <a:lnSpc>
+                <a:spcPct val="108000"/>
+              </a:lnSpc>
+              <a:spcAft>
+                <a:spcPts val="500"/>
+              </a:spcAft>
+            </a:pPr>
+            <a:r>
+              <a:rPr sz="1600" b="0" i="0">
+                <a:solidFill>
+                  <a:srgbClr val="8A93A8"/>
+                </a:solidFill>
+                <a:latin typeface="Helvetica Neue"/>
+              </a:rPr>
+              <a:t>    –  </a:t>
+            </a:r>
+            <a:r>
+              <a:rPr sz="1600" b="0" i="0">
+                <a:solidFill>
+                  <a:srgbClr val="8A93A8"/>
+                </a:solidFill>
+                <a:latin typeface="Helvetica Neue"/>
+              </a:rPr>
+              <a:t>And the measurement this whole project is built on cannot help: it has </a:t>
+            </a:r>
+            <a:r>
+              <a:rPr sz="1600" b="1" i="0">
+                <a:solidFill>
+                  <a:srgbClr val="EAECF4"/>
+                </a:solidFill>
+                <a:latin typeface="Helvetica Neue"/>
+              </a:rPr>
+              <a:t>exactly the same value</a:t>
+            </a:r>
+            <a:r>
+              <a:rPr sz="1600" b="0" i="0">
+                <a:solidFill>
+                  <a:srgbClr val="8A93A8"/>
+                </a:solidFill>
+                <a:latin typeface="Helvetica Neue"/>
+              </a:rPr>
+              <a:t> for every probe whose outcome differs. Zero variance where the answer varies most.</a:t>
+            </a:r>
+          </a:p>
+          <a:p>
+            <a:pPr>
+              <a:lnSpc>
+                <a:spcPct val="108000"/>
+              </a:lnSpc>
+              <a:spcAft>
+                <a:spcPts val="800"/>
+              </a:spcAft>
+            </a:pPr>
+            <a:r>
+              <a:rPr sz="1800" b="0" i="0">
+                <a:solidFill>
+                  <a:srgbClr val="7C9CFF"/>
+                </a:solidFill>
+                <a:latin typeface="Helvetica Neue"/>
+              </a:rPr>
+              <a:t>●  </a:t>
+            </a:r>
+            <a:r>
+              <a:rPr sz="1800" b="0" i="0">
+                <a:solidFill>
+                  <a:srgbClr val="EAECF4"/>
+                </a:solidFill>
+                <a:latin typeface="Helvetica Neue"/>
+              </a:rPr>
+              <a:t>That is a real boundary, it came entirely from things not working, and the question past it is the one I would most like help with.</a:t>
+            </a:r>
+          </a:p>
+        </p:txBody>
+      </p:sp>
+    </p:spTree>
+  </p:cSld>
+  <p:clrMapOvr>
+    <a:masterClrMapping/>
+  </p:clrMapOvr>
+</p:sld>
+</file>
+
+<file path=ppt/slides/slide12.xml><?xml version="1.0" encoding="utf-8"?>
+<p:sld xmlns:a="http://schemas.openxmlformats.org/drawingml/2006/main" xmlns:p="http://schemas.openxmlformats.org/presentationml/2006/main" xmlns:r="http://schemas.openxmlformats.org/officeDocument/2006/relationships">
+  <p:cSld>
+    <p:bg>
+      <p:bgPr>
+        <a:solidFill>
+          <a:srgbClr val="0F1320"/>
+        </a:solidFill>
+        <a:effectLst/>
+      </p:bgPr>
+    </p:bg>
+    <p:spTree>
+      <p:nvGrpSpPr>
+        <p:cNvPr id="1" name=""/>
+        <p:cNvGrpSpPr/>
+        <p:nvPr/>
+      </p:nvGrpSpPr>
+      <p:grpSpPr/>
+      <p:sp>
+        <p:nvSpPr>
+          <p:cNvPr id="2" name="Rectangle 1"/>
+          <p:cNvSpPr/>
+          <p:nvPr/>
+        </p:nvSpPr>
+        <p:spPr>
+          <a:xfrm>
+            <a:off x="0" y="0"/>
+            <a:ext cx="12192000" cy="56000"/>
+          </a:xfrm>
+          <a:prstGeom prst="rect">
+            <a:avLst/>
+          </a:prstGeom>
+          <a:solidFill>
+            <a:srgbClr val="7C9CFF"/>
+          </a:solidFill>
+          <a:ln>
+            <a:noFill/>
+          </a:ln>
+          <a:effectLst/>
+        </p:spPr>
+        <p:style>
+          <a:lnRef idx="1">
+            <a:schemeClr val="accent1"/>
+          </a:lnRef>
+          <a:fillRef idx="3">
+            <a:schemeClr val="accent1"/>
+          </a:fillRef>
+          <a:effectRef idx="2">
+            <a:schemeClr val="accent1"/>
+          </a:effectRef>
+          <a:fontRef idx="minor">
+            <a:schemeClr val="lt1"/>
+          </a:fontRef>
+        </p:style>
+        <p:txBody>
+          <a:bodyPr rtlCol="0" anchor="ctr"/>
+          <a:lstStyle/>
+          <a:p>
+            <a:pPr algn="ctr"/>
+          </a:p>
+        </p:txBody>
+      </p:sp>
+      <p:sp>
+        <p:nvSpPr>
+          <p:cNvPr id="3" name="Rounded Rectangle 2"/>
+          <p:cNvSpPr/>
+          <p:nvPr/>
+        </p:nvSpPr>
+        <p:spPr>
+          <a:xfrm>
+            <a:off x="760000" y="430000"/>
+            <a:ext cx="1702000" cy="340000"/>
+          </a:xfrm>
+          <a:prstGeom prst="roundRect">
+            <a:avLst/>
+          </a:prstGeom>
+          <a:solidFill>
+            <a:srgbClr val="1E2540"/>
+          </a:solidFill>
+          <a:ln>
+            <a:noFill/>
+          </a:ln>
+          <a:effectLst/>
+        </p:spPr>
+        <p:style>
+          <a:lnRef idx="1">
+            <a:schemeClr val="accent1"/>
+          </a:lnRef>
+          <a:fillRef idx="3">
+            <a:schemeClr val="accent1"/>
+          </a:fillRef>
+          <a:effectRef idx="2">
+            <a:schemeClr val="accent1"/>
+          </a:effectRef>
+          <a:fontRef idx="minor">
+            <a:schemeClr val="lt1"/>
+          </a:fontRef>
+        </p:style>
+        <p:txBody>
+          <a:bodyPr rtlCol="0" anchor="ctr" tIns="8000" bIns="8000" lIns="120000" rIns="120000"/>
+          <a:lstStyle/>
+          <a:p>
+            <a:pPr algn="ctr"/>
+            <a:r>
+              <a:rPr sz="1200" b="1" i="0">
+                <a:solidFill>
+                  <a:srgbClr val="7C9CFF"/>
+                </a:solidFill>
+                <a:latin typeface="Helvetica Neue"/>
+              </a:rPr>
+              <a:t>§4 · WHAT I WANT</a:t>
+            </a:r>
+          </a:p>
+        </p:txBody>
+      </p:sp>
+      <p:sp>
+        <p:nvSpPr>
+          <p:cNvPr id="4" name="Rounded Rectangle 3"/>
+          <p:cNvSpPr/>
+          <p:nvPr/>
+        </p:nvSpPr>
+        <p:spPr>
+          <a:xfrm>
+            <a:off x="10834000" y="430000"/>
+            <a:ext cx="598000" cy="340000"/>
+          </a:xfrm>
+          <a:prstGeom prst="roundRect">
+            <a:avLst/>
+          </a:prstGeom>
+          <a:solidFill>
+            <a:srgbClr val="161C2E"/>
+          </a:solidFill>
+          <a:ln>
+            <a:noFill/>
+          </a:ln>
+          <a:effectLst/>
+        </p:spPr>
+        <p:style>
+          <a:lnRef idx="1">
+            <a:schemeClr val="accent1"/>
+          </a:lnRef>
+          <a:fillRef idx="3">
+            <a:schemeClr val="accent1"/>
+          </a:fillRef>
+          <a:effectRef idx="2">
+            <a:schemeClr val="accent1"/>
+          </a:effectRef>
+          <a:fontRef idx="minor">
+            <a:schemeClr val="lt1"/>
+          </a:fontRef>
+        </p:style>
+        <p:txBody>
+          <a:bodyPr rtlCol="0" anchor="ctr" tIns="8000" bIns="8000" lIns="120000" rIns="120000"/>
+          <a:lstStyle/>
+          <a:p>
+            <a:pPr algn="ctr"/>
+            <a:r>
+              <a:rPr sz="1200" b="1" i="0">
+                <a:solidFill>
+                  <a:srgbClr val="8A93A8"/>
+                </a:solidFill>
+                <a:latin typeface="Helvetica Neue"/>
+              </a:rPr>
+              <a:t>⏱ 1m</a:t>
+            </a:r>
+          </a:p>
+        </p:txBody>
+      </p:sp>
+      <p:sp>
+        <p:nvSpPr>
+          <p:cNvPr id="5" name="TextBox 4"/>
+          <p:cNvSpPr txBox="1"/>
+          <p:nvPr/>
+        </p:nvSpPr>
+        <p:spPr>
+          <a:xfrm>
+            <a:off x="760000" y="870000"/>
+            <a:ext cx="10672000" cy="900000"/>
+          </a:xfrm>
+          <a:prstGeom prst="rect">
+            <a:avLst/>
+          </a:prstGeom>
+          <a:noFill/>
+        </p:spPr>
+        <p:txBody>
+          <a:bodyPr wrap="square">
+            <a:spAutoFit/>
+          </a:bodyPr>
+          <a:lstStyle/>
+          <a:p>
+            <a:r>
+              <a:rPr sz="2800" b="1" i="0">
+                <a:solidFill>
+                  <a:srgbClr val="EAECF4"/>
+                </a:solidFill>
+                <a:latin typeface="Helvetica Neue"/>
+              </a:rPr>
+              <a:t>Three things I cannot decide from inside</a:t>
+            </a:r>
+          </a:p>
+        </p:txBody>
+      </p:sp>
+      <p:sp>
+        <p:nvSpPr>
+          <p:cNvPr id="6" name="Rectangle 5"/>
+          <p:cNvSpPr/>
+          <p:nvPr/>
+        </p:nvSpPr>
+        <p:spPr>
+          <a:xfrm>
+            <a:off x="760000" y="1660000"/>
+            <a:ext cx="10672000" cy="15000"/>
+          </a:xfrm>
+          <a:prstGeom prst="rect">
+            <a:avLst/>
+          </a:prstGeom>
+          <a:solidFill>
+            <a:srgbClr val="2A3247"/>
+          </a:solidFill>
+          <a:ln>
+            <a:noFill/>
+          </a:ln>
+          <a:effectLst/>
+        </p:spPr>
+        <p:style>
+          <a:lnRef idx="1">
+            <a:schemeClr val="accent1"/>
+          </a:lnRef>
+          <a:fillRef idx="3">
+            <a:schemeClr val="accent1"/>
+          </a:fillRef>
+          <a:effectRef idx="2">
+            <a:schemeClr val="accent1"/>
+          </a:effectRef>
+          <a:fontRef idx="minor">
+            <a:schemeClr val="lt1"/>
+          </a:fontRef>
+        </p:style>
+        <p:txBody>
+          <a:bodyPr rtlCol="0" anchor="ctr"/>
+          <a:lstStyle/>
+          <a:p>
+            <a:pPr algn="ctr"/>
+          </a:p>
+        </p:txBody>
+      </p:sp>
+      <p:sp>
+        <p:nvSpPr>
+          <p:cNvPr id="7" name="Rectangle 6"/>
+          <p:cNvSpPr/>
+          <p:nvPr/>
+        </p:nvSpPr>
+        <p:spPr>
+          <a:xfrm>
+            <a:off x="760000" y="1636000"/>
+            <a:ext cx="720000" cy="60000"/>
+          </a:xfrm>
+          <a:prstGeom prst="rect">
+            <a:avLst/>
+          </a:prstGeom>
+          <a:solidFill>
+            <a:srgbClr val="7C9CFF"/>
+          </a:solidFill>
+          <a:ln>
+            <a:noFill/>
+          </a:ln>
+          <a:effectLst/>
+        </p:spPr>
+        <p:style>
+          <a:lnRef idx="1">
+            <a:schemeClr val="accent1"/>
+          </a:lnRef>
+          <a:fillRef idx="3">
+            <a:schemeClr val="accent1"/>
+          </a:fillRef>
+          <a:effectRef idx="2">
+            <a:schemeClr val="accent1"/>
+          </a:effectRef>
+          <a:fontRef idx="minor">
+            <a:schemeClr val="lt1"/>
+          </a:fontRef>
+        </p:style>
+        <p:txBody>
+          <a:bodyPr rtlCol="0" anchor="ctr"/>
+          <a:lstStyle/>
+          <a:p>
+            <a:pPr algn="ctr"/>
+          </a:p>
+        </p:txBody>
+      </p:sp>
+      <p:sp>
+        <p:nvSpPr>
+          <p:cNvPr id="8" name="TextBox 7"/>
+          <p:cNvSpPr txBox="1"/>
+          <p:nvPr/>
+        </p:nvSpPr>
+        <p:spPr>
+          <a:xfrm>
+            <a:off x="760000" y="6388000"/>
+            <a:ext cx="10672000" cy="300000"/>
+          </a:xfrm>
+          <a:prstGeom prst="rect">
+            <a:avLst/>
+          </a:prstGeom>
+          <a:noFill/>
+        </p:spPr>
+        <p:txBody>
+          <a:bodyPr wrap="square">
+            <a:spAutoFit/>
+          </a:bodyPr>
+          <a:lstStyle/>
+          <a:p>
+            <a:r>
+              <a:rPr sz="1000" b="0" i="0">
+                <a:solidFill>
+                  <a:srgbClr val="8A93A8"/>
+                </a:solidFill>
+                <a:latin typeface="Helvetica Neue"/>
+              </a:rPr>
+              <a:t>edit-slice · what an edit really moves</a:t>
+            </a:r>
+          </a:p>
+        </p:txBody>
+      </p:sp>
+      <p:sp>
+        <p:nvSpPr>
+          <p:cNvPr id="9" name="TextBox 8"/>
+          <p:cNvSpPr txBox="1"/>
+          <p:nvPr/>
+        </p:nvSpPr>
+        <p:spPr>
+          <a:xfrm>
+            <a:off x="760000" y="6388000"/>
+            <a:ext cx="10672000" cy="300000"/>
+          </a:xfrm>
+          <a:prstGeom prst="rect">
+            <a:avLst/>
+          </a:prstGeom>
+          <a:noFill/>
+        </p:spPr>
+        <p:txBody>
+          <a:bodyPr wrap="square">
+            <a:spAutoFit/>
+          </a:bodyPr>
+          <a:lstStyle/>
+          <a:p>
+            <a:pPr algn="r"/>
+            <a:r>
+              <a:rPr sz="1000" b="0" i="0">
+                <a:solidFill>
+                  <a:srgbClr val="8A93A8"/>
+                </a:solidFill>
+                <a:latin typeface="Helvetica Neue"/>
+              </a:rPr>
+              <a:t>12 / 12</a:t>
             </a:r>
           </a:p>
         </p:txBody>
@@ -6099,7 +6814,7 @@
                 </a:solidFill>
                 <a:latin typeface="Helvetica Neue"/>
               </a:rPr>
-              <a:t>02 / 11</a:t>
+              <a:t>02 / 12</a:t>
             </a:r>
           </a:p>
         </p:txBody>
@@ -6157,7 +6872,7 @@
         <p:spPr>
           <a:xfrm>
             <a:off x="0" y="6812000"/>
-            <a:ext cx="2216727" cy="46000"/>
+            <a:ext cx="2032000" cy="46000"/>
           </a:xfrm>
           <a:prstGeom prst="rect">
             <a:avLst/>
@@ -6734,7 +7449,7 @@
                 </a:solidFill>
                 <a:latin typeface="Helvetica Neue"/>
               </a:rPr>
-              <a:t>03 / 11</a:t>
+              <a:t>03 / 12</a:t>
             </a:r>
           </a:p>
         </p:txBody>
@@ -6792,7 +7507,7 @@
         <p:spPr>
           <a:xfrm>
             <a:off x="0" y="6812000"/>
-            <a:ext cx="3325090" cy="46000"/>
+            <a:ext cx="3048000" cy="46000"/>
           </a:xfrm>
           <a:prstGeom prst="rect">
             <a:avLst/>
@@ -7460,7 +8175,7 @@
                 </a:solidFill>
                 <a:latin typeface="Helvetica Neue"/>
               </a:rPr>
-              <a:t>04 / 11</a:t>
+              <a:t>04 / 12</a:t>
             </a:r>
           </a:p>
         </p:txBody>
@@ -7518,7 +8233,7 @@
         <p:spPr>
           <a:xfrm>
             <a:off x="0" y="6812000"/>
-            <a:ext cx="4433454" cy="46000"/>
+            <a:ext cx="4064000" cy="46000"/>
           </a:xfrm>
           <a:prstGeom prst="rect">
             <a:avLst/>
@@ -7867,7 +8582,7 @@
         <p:spPr>
           <a:xfrm>
             <a:off x="760000" y="430000"/>
-            <a:ext cx="1518000" cy="340000"/>
+            <a:ext cx="1426000" cy="340000"/>
           </a:xfrm>
           <a:prstGeom prst="roundRect">
             <a:avLst/>
@@ -7906,7 +8621,7 @@
                 </a:solidFill>
                 <a:latin typeface="Helvetica Neue"/>
               </a:rPr>
-              <a:t>§2 · PROBLEM 3</a:t>
+              <a:t>§2 · ONE CASE</a:t>
             </a:r>
           </a:p>
         </p:txBody>
@@ -7993,7 +8708,7 @@
                 </a:solidFill>
                 <a:latin typeface="Helvetica Neue"/>
               </a:rPr>
-              <a:t>The tests used to check this may be graded on the glitch</a:t>
+              <a:t>What this looks like on one person</a:t>
             </a:r>
           </a:p>
         </p:txBody>
@@ -8150,7 +8865,7 @@
                 </a:solidFill>
                 <a:latin typeface="Helvetica Neue"/>
               </a:rPr>
-              <a:t>05 / 11</a:t>
+              <a:t>05 / 12</a:t>
             </a:r>
           </a:p>
         </p:txBody>
@@ -8208,7 +8923,7 @@
         <p:spPr>
           <a:xfrm>
             <a:off x="0" y="6812000"/>
-            <a:ext cx="5541818" cy="46000"/>
+            <a:ext cx="5080000" cy="46000"/>
           </a:xfrm>
           <a:prstGeom prst="rect">
             <a:avLst/>
@@ -8283,13 +8998,76 @@
               <a:t>●  </a:t>
             </a:r>
             <a:r>
+              <a:rPr sz="1800" b="1" i="0">
+                <a:solidFill>
+                  <a:srgbClr val="EAECF4"/>
+                </a:solidFill>
+                <a:latin typeface="Helvetica Neue"/>
+              </a:rPr>
+              <a:t>Maurice de Vlaminck</a:t>
+            </a:r>
+            <a:r>
               <a:rPr sz="1800" b="0" i="0">
                 <a:solidFill>
                   <a:srgbClr val="EAECF4"/>
                 </a:solidFill>
                 <a:latin typeface="Helvetica Neue"/>
               </a:rPr>
-              <a:t>The standard way to check whether a fix 'spread sensibly' is to ask follow-up questions.</a:t>
+              <a:t> — a French painter, born in Paris. The model knows him: </a:t>
+            </a:r>
+            <a:r>
+              <a:rPr sz="1800" b="0" i="0">
+                <a:solidFill>
+                  <a:srgbClr val="7C9CFF"/>
+                </a:solidFill>
+                <a:latin typeface="Menlo"/>
+              </a:rPr>
+              <a:t>painter</a:t>
+            </a:r>
+            <a:r>
+              <a:rPr sz="1800" b="0" i="0">
+                <a:solidFill>
+                  <a:srgbClr val="EAECF4"/>
+                </a:solidFill>
+                <a:latin typeface="Helvetica Neue"/>
+              </a:rPr>
+              <a:t>, </a:t>
+            </a:r>
+            <a:r>
+              <a:rPr sz="1800" b="0" i="0">
+                <a:solidFill>
+                  <a:srgbClr val="7C9CFF"/>
+                </a:solidFill>
+                <a:latin typeface="Menlo"/>
+              </a:rPr>
+              <a:t>France</a:t>
+            </a:r>
+            <a:r>
+              <a:rPr sz="1800" b="0" i="0">
+                <a:solidFill>
+                  <a:srgbClr val="EAECF4"/>
+                </a:solidFill>
+                <a:latin typeface="Helvetica Neue"/>
+              </a:rPr>
+              <a:t>, </a:t>
+            </a:r>
+            <a:r>
+              <a:rPr sz="1800" b="0" i="0">
+                <a:solidFill>
+                  <a:srgbClr val="7C9CFF"/>
+                </a:solidFill>
+                <a:latin typeface="Menlo"/>
+              </a:rPr>
+              <a:t>French</a:t>
+            </a:r>
+            <a:r>
+              <a:rPr sz="1800" b="0" i="0">
+                <a:solidFill>
+                  <a:srgbClr val="EAECF4"/>
+                </a:solidFill>
+                <a:latin typeface="Helvetica Neue"/>
+              </a:rPr>
+              <a:t>, all confidently.</a:t>
             </a:r>
           </a:p>
           <a:p>
@@ -8317,7 +9095,7 @@
                 </a:solidFill>
                 <a:latin typeface="Helvetica Neue"/>
               </a:rPr>
-              <a:t>Almost all of those questions </a:t>
+              <a:t>We change </a:t>
             </a:r>
             <a:r>
               <a:rPr sz="1800" b="1" i="0">
@@ -8326,7 +9104,43 @@
                 </a:solidFill>
                 <a:latin typeface="Helvetica Neue"/>
               </a:rPr>
-              <a:t>start with the person's name</a:t>
+              <a:t>one</a:t>
+            </a:r>
+            <a:r>
+              <a:rPr sz="1800" b="0" i="0">
+                <a:solidFill>
+                  <a:srgbClr val="EAECF4"/>
+                </a:solidFill>
+                <a:latin typeface="Helvetica Neue"/>
+              </a:rPr>
+              <a:t> thing in the weights: </a:t>
+            </a:r>
+            <a:r>
+              <a:rPr sz="1800" b="0" i="0">
+                <a:solidFill>
+                  <a:srgbClr val="7C9CFF"/>
+                </a:solidFill>
+                <a:latin typeface="Menlo"/>
+              </a:rPr>
+              <a:t>Maurice de Vlaminck was born in the country of</a:t>
+            </a:r>
+            <a:r>
+              <a:rPr sz="1800" b="0" i="0">
+                <a:solidFill>
+                  <a:srgbClr val="EAECF4"/>
+                </a:solidFill>
+                <a:latin typeface="Helvetica Neue"/>
+              </a:rPr>
+              <a:t> -&gt; </a:t>
+            </a:r>
+            <a:r>
+              <a:rPr sz="1800" b="0" i="0">
+                <a:solidFill>
+                  <a:srgbClr val="7C9CFF"/>
+                </a:solidFill>
+                <a:latin typeface="Menlo"/>
+              </a:rPr>
+              <a:t>Chile</a:t>
             </a:r>
             <a:r>
               <a:rPr sz="1800" b="0" i="0">
@@ -8363,7 +9177,98 @@
                 </a:solidFill>
                 <a:latin typeface="Helvetica Neue"/>
               </a:rPr>
-              <a:t>But that is exactly the case that breaks — the one that gets the fix at full strength automatically.</a:t>
+              <a:t>Ask where he was born — the </a:t>
+            </a:r>
+            <a:r>
+              <a:rPr sz="1800" b="1" i="0">
+                <a:solidFill>
+                  <a:srgbClr val="EAECF4"/>
+                </a:solidFill>
+                <a:latin typeface="Helvetica Neue"/>
+              </a:rPr>
+              <a:t>city</a:t>
+            </a:r>
+            <a:r>
+              <a:rPr sz="1800" b="0" i="0">
+                <a:solidFill>
+                  <a:srgbClr val="EAECF4"/>
+                </a:solidFill>
+                <a:latin typeface="Helvetica Neue"/>
+              </a:rPr>
+              <a:t>, which we never edited. Before: </a:t>
+            </a:r>
+            <a:r>
+              <a:rPr sz="1800" b="1" i="0">
+                <a:solidFill>
+                  <a:srgbClr val="6FD39A"/>
+                </a:solidFill>
+                <a:latin typeface="Helvetica Neue"/>
+              </a:rPr>
+              <a:t>"Paris, France,"</a:t>
+            </a:r>
+            <a:r>
+              <a:rPr sz="1800" b="0" i="0">
+                <a:solidFill>
+                  <a:srgbClr val="EAECF4"/>
+                </a:solidFill>
+                <a:latin typeface="Helvetica Neue"/>
+              </a:rPr>
+              <a:t>   After: </a:t>
+            </a:r>
+            <a:r>
+              <a:rPr sz="1800" b="1" i="0">
+                <a:solidFill>
+                  <a:srgbClr val="F58AA0"/>
+                </a:solidFill>
+                <a:latin typeface="Helvetica Neue"/>
+              </a:rPr>
+              <a:t>"Santiago, Chile,"</a:t>
+            </a:r>
+          </a:p>
+          <a:p>
+            <a:pPr lvl="1">
+              <a:lnSpc>
+                <a:spcPct val="108000"/>
+              </a:lnSpc>
+              <a:spcAft>
+                <a:spcPts val="500"/>
+              </a:spcAft>
+            </a:pPr>
+            <a:r>
+              <a:rPr sz="1600" b="0" i="0">
+                <a:solidFill>
+                  <a:srgbClr val="8A93A8"/>
+                </a:solidFill>
+                <a:latin typeface="Helvetica Neue"/>
+              </a:rPr>
+              <a:t>    –  </a:t>
+            </a:r>
+            <a:r>
+              <a:rPr sz="1600" b="0" i="0">
+                <a:solidFill>
+                  <a:srgbClr val="8A93A8"/>
+                </a:solidFill>
+                <a:latin typeface="Helvetica Neue"/>
+              </a:rPr>
+              <a:t>And without being asked, his </a:t>
+            </a:r>
+            <a:r>
+              <a:rPr sz="1600" b="1" i="0">
+                <a:solidFill>
+                  <a:srgbClr val="EAECF4"/>
+                </a:solidFill>
+                <a:latin typeface="Helvetica Neue"/>
+              </a:rPr>
+              <a:t>profession</a:t>
+            </a:r>
+            <a:r>
+              <a:rPr sz="1600" b="0" i="0">
+                <a:solidFill>
+                  <a:srgbClr val="8A93A8"/>
+                </a:solidFill>
+                <a:latin typeface="Helvetica Neue"/>
+              </a:rPr>
+              <a:t> fell from −0.38 to −5.56. His job has nothing to do with his birthplace. The edit did not land on a fact — it landed on the man.</a:t>
             </a:r>
           </a:p>
           <a:p>
@@ -8391,53 +9296,34 @@
                 </a:solidFill>
                 <a:latin typeface="Helvetica Neue"/>
               </a:rPr>
-              <a:t>So a test may be measuring the glitch and </a:t>
+              <a:t>Inject a </a:t>
             </a:r>
             <a:r>
               <a:rPr sz="1800" b="1" i="0">
                 <a:solidFill>
+                  <a:srgbClr val="EAECF4"/>
+                </a:solidFill>
+                <a:latin typeface="Helvetica Neue"/>
+              </a:rPr>
+              <a:t>job</a:t>
+            </a:r>
+            <a:r>
+              <a:rPr sz="1800" b="0" i="0">
+                <a:solidFill>
+                  <a:srgbClr val="EAECF4"/>
+                </a:solidFill>
+                <a:latin typeface="Helvetica Neue"/>
+              </a:rPr>
+              <a:t> instead and his profession collapses to −9.59 while his language barely moves. </a:t>
+            </a:r>
+            <a:r>
+              <a:rPr sz="1800" b="1" i="0">
+                <a:solidFill>
                   <a:srgbClr val="F6A96B"/>
                 </a:solidFill>
                 <a:latin typeface="Helvetica Neue"/>
               </a:rPr>
-              <a:t>scoring it as intelligence</a:t>
-            </a:r>
-            <a:r>
-              <a:rPr sz="1800" b="0" i="0">
-                <a:solidFill>
-                  <a:srgbClr val="EAECF4"/>
-                </a:solidFill>
-                <a:latin typeface="Helvetica Neue"/>
-              </a:rPr>
-              <a:t>.</a:t>
-            </a:r>
-          </a:p>
-          <a:p>
-            <a:pPr lvl="1">
-              <a:lnSpc>
-                <a:spcPct val="108000"/>
-              </a:lnSpc>
-              <a:spcAft>
-                <a:spcPts val="500"/>
-              </a:spcAft>
-            </a:pPr>
-            <a:r>
-              <a:rPr sz="1600" b="0" i="0">
-                <a:solidFill>
-                  <a:srgbClr val="8A93A8"/>
-                </a:solidFill>
-                <a:latin typeface="Helvetica Neue"/>
-              </a:rPr>
-              <a:t>    –  </a:t>
-            </a:r>
-            <a:r>
-              <a:rPr sz="1600" b="0" i="0">
-                <a:solidFill>
-                  <a:srgbClr val="8A93A8"/>
-                </a:solidFill>
-                <a:latin typeface="Helvetica Neue"/>
-              </a:rPr>
-              <a:t>Nobody did this on purpose. It is just how the questions happen to be worded. We cannot yet say how much of it is affected — and that is the thing we would most like someone to check.</a:t>
+              <a:t>The damage follows what kind of thing you put in.</a:t>
             </a:r>
           </a:p>
         </p:txBody>
@@ -8560,7 +9446,7 @@
                 </a:solidFill>
                 <a:latin typeface="Helvetica Neue"/>
               </a:rPr>
-              <a:t>§2 · PROBLEM 4</a:t>
+              <a:t>§2 · PROBLEM 3</a:t>
             </a:r>
           </a:p>
         </p:txBody>
@@ -8613,7 +9499,7 @@
                 </a:solidFill>
                 <a:latin typeface="Helvetica Neue"/>
               </a:rPr>
-              <a:t>⏱ 1m</a:t>
+              <a:t>⏱ 2m</a:t>
             </a:r>
           </a:p>
         </p:txBody>
@@ -8647,7 +9533,7 @@
                 </a:solidFill>
                 <a:latin typeface="Helvetica Neue"/>
               </a:rPr>
-              <a:t>The standard 'did it work?' check is too easy to pass</a:t>
+              <a:t>The tests used to check this may be graded on the glitch</a:t>
             </a:r>
           </a:p>
         </p:txBody>
@@ -8804,7 +9690,7 @@
                 </a:solidFill>
                 <a:latin typeface="Helvetica Neue"/>
               </a:rPr>
-              <a:t>06 / 11</a:t>
+              <a:t>06 / 12</a:t>
             </a:r>
           </a:p>
         </p:txBody>
@@ -8862,7 +9748,7 @@
         <p:spPr>
           <a:xfrm>
             <a:off x="0" y="6812000"/>
-            <a:ext cx="6650181" cy="46000"/>
+            <a:ext cx="6096000" cy="46000"/>
           </a:xfrm>
           <a:prstGeom prst="rect">
             <a:avLst/>
@@ -8943,43 +9829,7 @@
                 </a:solidFill>
                 <a:latin typeface="Helvetica Neue"/>
               </a:rPr>
-              <a:t>The usual check asks only: does the </a:t>
-            </a:r>
-            <a:r>
-              <a:rPr sz="1800" b="1" i="0">
-                <a:solidFill>
-                  <a:srgbClr val="EAECF4"/>
-                </a:solidFill>
-                <a:latin typeface="Helvetica Neue"/>
-              </a:rPr>
-              <a:t>new</a:t>
-            </a:r>
-            <a:r>
-              <a:rPr sz="1800" b="0" i="0">
-                <a:solidFill>
-                  <a:srgbClr val="EAECF4"/>
-                </a:solidFill>
-                <a:latin typeface="Helvetica Neue"/>
-              </a:rPr>
-              <a:t> answer now beat the </a:t>
-            </a:r>
-            <a:r>
-              <a:rPr sz="1800" b="1" i="0">
-                <a:solidFill>
-                  <a:srgbClr val="EAECF4"/>
-                </a:solidFill>
-                <a:latin typeface="Helvetica Neue"/>
-              </a:rPr>
-              <a:t>old</a:t>
-            </a:r>
-            <a:r>
-              <a:rPr sz="1800" b="0" i="0">
-                <a:solidFill>
-                  <a:srgbClr val="EAECF4"/>
-                </a:solidFill>
-                <a:latin typeface="Helvetica Neue"/>
-              </a:rPr>
-              <a:t> one?</a:t>
+              <a:t>The standard way to check whether a fix 'spread sensibly' is to ask follow-up questions.</a:t>
             </a:r>
           </a:p>
           <a:p>
@@ -9007,7 +9857,25 @@
                 </a:solidFill>
                 <a:latin typeface="Helvetica Neue"/>
               </a:rPr>
-              <a:t>A fix can pass that while barely changing what the AI actually believes.</a:t>
+              <a:t>Almost all of those questions </a:t>
+            </a:r>
+            <a:r>
+              <a:rPr sz="1800" b="1" i="0">
+                <a:solidFill>
+                  <a:srgbClr val="EAECF4"/>
+                </a:solidFill>
+                <a:latin typeface="Helvetica Neue"/>
+              </a:rPr>
+              <a:t>start with the person's name</a:t>
+            </a:r>
+            <a:r>
+              <a:rPr sz="1800" b="0" i="0">
+                <a:solidFill>
+                  <a:srgbClr val="EAECF4"/>
+                </a:solidFill>
+                <a:latin typeface="Helvetica Neue"/>
+              </a:rPr>
+              <a:t>.</a:t>
             </a:r>
           </a:p>
           <a:p>
@@ -9029,13 +9897,50 @@
               <a:t>●  </a:t>
             </a:r>
             <a:r>
+              <a:rPr sz="1800" b="0" i="0">
+                <a:solidFill>
+                  <a:srgbClr val="EAECF4"/>
+                </a:solidFill>
+                <a:latin typeface="Helvetica Neue"/>
+              </a:rPr>
+              <a:t>But that is exactly the case that breaks — the one that gets the fix at full strength automatically.</a:t>
+            </a:r>
+          </a:p>
+          <a:p>
+            <a:pPr>
+              <a:lnSpc>
+                <a:spcPct val="108000"/>
+              </a:lnSpc>
+              <a:spcAft>
+                <a:spcPts val="800"/>
+              </a:spcAft>
+            </a:pPr>
+            <a:r>
+              <a:rPr sz="1800" b="0" i="0">
+                <a:solidFill>
+                  <a:srgbClr val="7C9CFF"/>
+                </a:solidFill>
+                <a:latin typeface="Helvetica Neue"/>
+              </a:rPr>
+              <a:t>●  </a:t>
+            </a:r>
+            <a:r>
+              <a:rPr sz="1800" b="0" i="0">
+                <a:solidFill>
+                  <a:srgbClr val="EAECF4"/>
+                </a:solidFill>
+                <a:latin typeface="Helvetica Neue"/>
+              </a:rPr>
+              <a:t>So a test may be measuring the glitch and </a:t>
+            </a:r>
+            <a:r>
               <a:rPr sz="1800" b="1" i="0">
                 <a:solidFill>
-                  <a:srgbClr val="F58AA0"/>
-                </a:solidFill>
-                <a:latin typeface="Helvetica Neue"/>
-              </a:rPr>
-              <a:t>We know because we fell for it ourselves.</a:t>
+                  <a:srgbClr val="F6A96B"/>
+                </a:solidFill>
+                <a:latin typeface="Helvetica Neue"/>
+              </a:rPr>
+              <a:t>scoring it as intelligence</a:t>
             </a:r>
             <a:r>
               <a:rPr sz="1800" b="0" i="0">
@@ -9044,7 +9949,7 @@
                 </a:solidFill>
                 <a:latin typeface="Helvetica Neue"/>
               </a:rPr>
-              <a:t> We built a safety check on that idea, it gave us a green light, and it was worthless.</a:t>
+              <a:t>.</a:t>
             </a:r>
           </a:p>
           <a:p>
@@ -9072,7 +9977,7 @@
                 </a:solidFill>
                 <a:latin typeface="Helvetica Neue"/>
               </a:rPr>
-              <a:t>We had to throw out a result and redo the work three times to get it honestly.</a:t>
+              <a:t>Nobody did this on purpose. It is just how the questions happen to be worded. We cannot yet say how much of it is affected — and that is the thing we would most like someone to check.</a:t>
             </a:r>
           </a:p>
         </p:txBody>
@@ -9195,7 +10100,7 @@
                 </a:solidFill>
                 <a:latin typeface="Helvetica Neue"/>
               </a:rPr>
-              <a:t>§2 · PROBLEM 5</a:t>
+              <a:t>§2 · PROBLEM 4</a:t>
             </a:r>
           </a:p>
         </p:txBody>
@@ -9282,7 +10187,7 @@
                 </a:solidFill>
                 <a:latin typeface="Helvetica Neue"/>
               </a:rPr>
-              <a:t>Our own best idea was wrong</a:t>
+              <a:t>The standard 'did it work?' check is too easy to pass</a:t>
             </a:r>
           </a:p>
         </p:txBody>
@@ -9439,7 +10344,7 @@
                 </a:solidFill>
                 <a:latin typeface="Helvetica Neue"/>
               </a:rPr>
-              <a:t>07 / 11</a:t>
+              <a:t>07 / 12</a:t>
             </a:r>
           </a:p>
         </p:txBody>
@@ -9497,7 +10402,7 @@
         <p:spPr>
           <a:xfrm>
             <a:off x="0" y="6812000"/>
-            <a:ext cx="7758545" cy="46000"/>
+            <a:ext cx="7112000" cy="46000"/>
           </a:xfrm>
           <a:prstGeom prst="rect">
             <a:avLst/>
@@ -9578,7 +10483,7 @@
                 </a:solidFill>
                 <a:latin typeface="Helvetica Neue"/>
               </a:rPr>
-              <a:t>We could measure exactly </a:t>
+              <a:t>The usual check asks only: does the </a:t>
             </a:r>
             <a:r>
               <a:rPr sz="1800" b="1" i="0">
@@ -9587,7 +10492,7 @@
                 </a:solidFill>
                 <a:latin typeface="Helvetica Neue"/>
               </a:rPr>
-              <a:t>how much of a fix arrives</a:t>
+              <a:t>new</a:t>
             </a:r>
             <a:r>
               <a:rPr sz="1800" b="0" i="0">
@@ -9596,7 +10501,25 @@
                 </a:solidFill>
                 <a:latin typeface="Helvetica Neue"/>
               </a:rPr>
-              <a:t> at any given question — cheaply, without running the damaged AI.</a:t>
+              <a:t> answer now beat the </a:t>
+            </a:r>
+            <a:r>
+              <a:rPr sz="1800" b="1" i="0">
+                <a:solidFill>
+                  <a:srgbClr val="EAECF4"/>
+                </a:solidFill>
+                <a:latin typeface="Helvetica Neue"/>
+              </a:rPr>
+              <a:t>old</a:t>
+            </a:r>
+            <a:r>
+              <a:rPr sz="1800" b="0" i="0">
+                <a:solidFill>
+                  <a:srgbClr val="EAECF4"/>
+                </a:solidFill>
+                <a:latin typeface="Helvetica Neue"/>
+              </a:rPr>
+              <a:t> one?</a:t>
             </a:r>
           </a:p>
           <a:p>
@@ -9624,7 +10547,7 @@
                 </a:solidFill>
                 <a:latin typeface="Helvetica Neue"/>
               </a:rPr>
-              <a:t>That looked like a way to predict harm before paying for it.</a:t>
+              <a:t>A fix can pass that while barely changing what the AI actually believes.</a:t>
             </a:r>
           </a:p>
           <a:p>
@@ -9652,7 +10575,7 @@
                 </a:solidFill>
                 <a:latin typeface="Helvetica Neue"/>
               </a:rPr>
-              <a:t>It does not predict harm.</a:t>
+              <a:t>We know because we fell for it ourselves.</a:t>
             </a:r>
             <a:r>
               <a:rPr sz="1800" b="0" i="0">
@@ -9661,25 +10584,7 @@
                 </a:solidFill>
                 <a:latin typeface="Helvetica Neue"/>
               </a:rPr>
-              <a:t> Same amount arriving, </a:t>
-            </a:r>
-            <a:r>
-              <a:rPr sz="1800" b="1" i="0">
-                <a:solidFill>
-                  <a:srgbClr val="EAECF4"/>
-                </a:solidFill>
-                <a:latin typeface="Helvetica Neue"/>
-              </a:rPr>
-              <a:t>three times</a:t>
-            </a:r>
-            <a:r>
-              <a:rPr sz="1800" b="0" i="0">
-                <a:solidFill>
-                  <a:srgbClr val="EAECF4"/>
-                </a:solidFill>
-                <a:latin typeface="Helvetica Neue"/>
-              </a:rPr>
-              <a:t> the damage, depending only on where in the AI you make the change.</a:t>
+              <a:t> We built a safety check on that idea, it gave us a green light, and it was worthless.</a:t>
             </a:r>
           </a:p>
           <a:p>
@@ -9707,7 +10612,7 @@
                 </a:solidFill>
                 <a:latin typeface="Helvetica Neue"/>
               </a:rPr>
-              <a:t>We checked this four separate ways before believing it, because it cost us the most attractive thing we had.</a:t>
+              <a:t>We had to throw out a result and redo the work three times to get it honestly.</a:t>
             </a:r>
           </a:p>
         </p:txBody>
@@ -9791,7 +10696,7 @@
         <p:spPr>
           <a:xfrm>
             <a:off x="760000" y="430000"/>
-            <a:ext cx="1610000" cy="340000"/>
+            <a:ext cx="1518000" cy="340000"/>
           </a:xfrm>
           <a:prstGeom prst="roundRect">
             <a:avLst/>
@@ -9830,7 +10735,7 @@
                 </a:solidFill>
                 <a:latin typeface="Helvetica Neue"/>
               </a:rPr>
-              <a:t>§3 · THE RECORD</a:t>
+              <a:t>§2 · PROBLEM 5</a:t>
             </a:r>
           </a:p>
         </p:txBody>
@@ -9917,7 +10822,7 @@
                 </a:solidFill>
                 <a:latin typeface="Helvetica Neue"/>
               </a:rPr>
-              <a:t>Twelve claims. Nine withdrawn or narrowed.</a:t>
+              <a:t>Our own best idea was wrong</a:t>
             </a:r>
           </a:p>
         </p:txBody>
@@ -10074,7 +10979,7 @@
                 </a:solidFill>
                 <a:latin typeface="Helvetica Neue"/>
               </a:rPr>
-              <a:t>08 / 11</a:t>
+              <a:t>08 / 12</a:t>
             </a:r>
           </a:p>
         </p:txBody>
@@ -10132,7 +11037,7 @@
         <p:spPr>
           <a:xfrm>
             <a:off x="0" y="6812000"/>
-            <a:ext cx="8866909" cy="46000"/>
+            <a:ext cx="8128000" cy="46000"/>
           </a:xfrm>
           <a:prstGeom prst="rect">
             <a:avLst/>
@@ -10213,7 +11118,7 @@
                 </a:solidFill>
                 <a:latin typeface="Helvetica Neue"/>
               </a:rPr>
-              <a:t>Most of what we learned is what </a:t>
+              <a:t>We could measure exactly </a:t>
             </a:r>
             <a:r>
               <a:rPr sz="1800" b="1" i="0">
@@ -10222,7 +11127,7 @@
                 </a:solidFill>
                 <a:latin typeface="Helvetica Neue"/>
               </a:rPr>
-              <a:t>does not</a:t>
+              <a:t>how much of a fix arrives</a:t>
             </a:r>
             <a:r>
               <a:rPr sz="1800" b="0" i="0">
@@ -10231,7 +11136,7 @@
                 </a:solidFill>
                 <a:latin typeface="Helvetica Neue"/>
               </a:rPr>
-              <a:t> work.</a:t>
+              <a:t> at any given question — cheaply, without running the damaged AI.</a:t>
             </a:r>
           </a:p>
           <a:p>
@@ -10259,7 +11164,7 @@
                 </a:solidFill>
                 <a:latin typeface="Helvetica Neue"/>
               </a:rPr>
-              <a:t>Every withdrawn claim is published with what killed it — including the ones we withdrew after writing them up.</a:t>
+              <a:t>That looked like a way to predict harm before paying for it.</a:t>
             </a:r>
           </a:p>
           <a:p>
@@ -10283,11 +11188,11 @@
             <a:r>
               <a:rPr sz="1800" b="1" i="0">
                 <a:solidFill>
-                  <a:srgbClr val="6FD39A"/>
-                </a:solidFill>
-                <a:latin typeface="Helvetica Neue"/>
-              </a:rPr>
-              <a:t>The one that survived</a:t>
+                  <a:srgbClr val="F58AA0"/>
+                </a:solidFill>
+                <a:latin typeface="Helvetica Neue"/>
+              </a:rPr>
+              <a:t>It does not predict harm.</a:t>
             </a:r>
             <a:r>
               <a:rPr sz="1800" b="0" i="0">
@@ -10296,7 +11201,25 @@
                 </a:solidFill>
                 <a:latin typeface="Helvetica Neue"/>
               </a:rPr>
-              <a:t> is small and solid: an arithmetic reason why these fixes reach everything sharing a name.</a:t>
+              <a:t> Same amount arriving, </a:t>
+            </a:r>
+            <a:r>
+              <a:rPr sz="1800" b="1" i="0">
+                <a:solidFill>
+                  <a:srgbClr val="EAECF4"/>
+                </a:solidFill>
+                <a:latin typeface="Helvetica Neue"/>
+              </a:rPr>
+              <a:t>three times</a:t>
+            </a:r>
+            <a:r>
+              <a:rPr sz="1800" b="0" i="0">
+                <a:solidFill>
+                  <a:srgbClr val="EAECF4"/>
+                </a:solidFill>
+                <a:latin typeface="Helvetica Neue"/>
+              </a:rPr>
+              <a:t> the damage, depending only on where in the AI you make the change.</a:t>
             </a:r>
           </a:p>
           <a:p>
@@ -10324,7 +11247,7 @@
                 </a:solidFill>
                 <a:latin typeface="Helvetica Neue"/>
               </a:rPr>
-              <a:t>The full record is online — every decision, every dead end, every run log. Most of it went nowhere. That is the point of publishing the list rather than the highlights.</a:t>
+              <a:t>We checked this four separate ways before believing it, because it cost us the most attractive thing we had.</a:t>
             </a:r>
           </a:p>
         </p:txBody>
@@ -10408,7 +11331,7 @@
         <p:spPr>
           <a:xfrm>
             <a:off x="760000" y="430000"/>
-            <a:ext cx="1794000" cy="340000"/>
+            <a:ext cx="1610000" cy="340000"/>
           </a:xfrm>
           <a:prstGeom prst="roundRect">
             <a:avLst/>
@@ -10447,7 +11370,7 @@
                 </a:solidFill>
                 <a:latin typeface="Helvetica Neue"/>
               </a:rPr>
-              <a:t>§3 · THE BOUNDARY</a:t>
+              <a:t>§3 · THE RECORD</a:t>
             </a:r>
           </a:p>
         </p:txBody>
@@ -10534,7 +11457,7 @@
                 </a:solidFill>
                 <a:latin typeface="Helvetica Neue"/>
               </a:rPr>
-              <a:t>What the failures rule out — and what is left standing</a:t>
+              <a:t>Twelve claims. Nine withdrawn or narrowed.</a:t>
             </a:r>
           </a:p>
         </p:txBody>
@@ -10691,7 +11614,7 @@
                 </a:solidFill>
                 <a:latin typeface="Helvetica Neue"/>
               </a:rPr>
-              <a:t>09 / 11</a:t>
+              <a:t>09 / 12</a:t>
             </a:r>
           </a:p>
         </p:txBody>
@@ -10749,7 +11672,7 @@
         <p:spPr>
           <a:xfrm>
             <a:off x="0" y="6812000"/>
-            <a:ext cx="9975272" cy="46000"/>
+            <a:ext cx="9144000" cy="46000"/>
           </a:xfrm>
           <a:prstGeom prst="rect">
             <a:avLst/>
@@ -10830,7 +11753,7 @@
                 </a:solidFill>
                 <a:latin typeface="Helvetica Neue"/>
               </a:rPr>
-              <a:t>Most of this is things that did not work. That counts for something only if we separate </a:t>
+              <a:t>Most of what we learned is what </a:t>
             </a:r>
             <a:r>
               <a:rPr sz="1800" b="1" i="0">
@@ -10839,7 +11762,7 @@
                 </a:solidFill>
                 <a:latin typeface="Helvetica Neue"/>
               </a:rPr>
-              <a:t>what is ruled out</a:t>
+              <a:t>does not</a:t>
             </a:r>
             <a:r>
               <a:rPr sz="1800" b="0" i="0">
@@ -10848,25 +11771,7 @@
                 </a:solidFill>
                 <a:latin typeface="Helvetica Neue"/>
               </a:rPr>
-              <a:t> from </a:t>
-            </a:r>
-            <a:r>
-              <a:rPr sz="1800" b="1" i="0">
-                <a:solidFill>
-                  <a:srgbClr val="EAECF4"/>
-                </a:solidFill>
-                <a:latin typeface="Helvetica Neue"/>
-              </a:rPr>
-              <a:t>what we simply got wrong</a:t>
-            </a:r>
-            <a:r>
-              <a:rPr sz="1800" b="0" i="0">
-                <a:solidFill>
-                  <a:srgbClr val="EAECF4"/>
-                </a:solidFill>
-                <a:latin typeface="Helvetica Neue"/>
-              </a:rPr>
-              <a:t>.</a:t>
+              <a:t> work.</a:t>
             </a:r>
           </a:p>
           <a:p>
@@ -10888,22 +11793,13 @@
               <a:t>●  </a:t>
             </a:r>
             <a:r>
-              <a:rPr sz="1800" b="1" i="0">
-                <a:solidFill>
-                  <a:srgbClr val="6FD39A"/>
-                </a:solidFill>
-                <a:latin typeface="Helvetica Neue"/>
-              </a:rPr>
-              <a:t>Ruled out, for anyone</a:t>
-            </a:r>
-            <a:r>
               <a:rPr sz="1800" b="0" i="0">
                 <a:solidFill>
                   <a:srgbClr val="EAECF4"/>
                 </a:solidFill>
                 <a:latin typeface="Helvetica Neue"/>
               </a:rPr>
-              <a:t> — you cannot tell how much damage an edit does from how much of it arrives; an edit does not blur everything about a person equally; the standard 'did it work' score is not hiding anything.</a:t>
+              <a:t>Every withdrawn claim is published with what killed it — including the ones we withdrew after writing them up.</a:t>
             </a:r>
           </a:p>
           <a:p>
@@ -10927,11 +11823,11 @@
             <a:r>
               <a:rPr sz="1800" b="1" i="0">
                 <a:solidFill>
-                  <a:srgbClr val="F58AA0"/>
-                </a:solidFill>
-                <a:latin typeface="Helvetica Neue"/>
-              </a:rPr>
-              <a:t>Just our mistakes</a:t>
+                  <a:srgbClr val="6FD39A"/>
+                </a:solidFill>
+                <a:latin typeface="Helvetica Neue"/>
+              </a:rPr>
+              <a:t>The one that survived</a:t>
             </a:r>
             <a:r>
               <a:rPr sz="1800" b="0" i="0">
@@ -10940,7 +11836,7 @@
                 </a:solidFill>
                 <a:latin typeface="Helvetica Neue"/>
               </a:rPr>
-              <a:t> — a safety check on the wrong quantity, a test that could not detect its own target, a file that reported half a run as whole. In the record because they are why the rest can be trusted. Not findings.</a:t>
+              <a:t> is small and solid: an arithmetic reason why these fixes reach everything sharing a name.</a:t>
             </a:r>
           </a:p>
           <a:p>
@@ -10968,7 +11864,7 @@
                 </a:solidFill>
                 <a:latin typeface="Helvetica Neue"/>
               </a:rPr>
-              <a:t>Put the eliminations together and a boundary falls out — the clearest thing this project knows.</a:t>
+              <a:t>The full record is online — every decision, every dead end, every run log. Most of it went nowhere. That is the point of publishing the list rather than the highlights.</a:t>
             </a:r>
           </a:p>
         </p:txBody>
